--- a/learning/P01_zephyr_make_project/slides/P006_原生CMake与目标模型_Windows.pptx
+++ b/learning/P01_zephyr_make_project/slides/P006_原生CMake与目标模型_Windows.pptx
@@ -23133,7 +23133,7 @@
             <a:r>
               <a:rPr sz="1725" b="0">
                 <a:solidFill>
-                  <a:srgbClr val="29263B"/>
+                  <a:srgbClr val="646173"/>
                 </a:solidFill>
                 <a:latin typeface="Consolas"/>
                 <a:ea typeface="Consolas"/>
@@ -23209,21 +23209,13 @@
             <a:r>
               <a:rPr sz="1725" b="0">
                 <a:solidFill>
-                  <a:srgbClr val="29263B"/>
+                  <a:srgbClr val="A02B93"/>
                 </a:solidFill>
                 <a:latin typeface="Consolas"/>
                 <a:ea typeface="Consolas"/>
                 <a:cs typeface="Consolas"/>
               </a:rPr>
-              <a:t>if </a:t>
-            </a:r>
-            <a:r>
-              <a:rPr>
-                <a:solidFill>
-                  <a:srgbClr val="A02B93"/>
-                </a:solidFill>
-              </a:rPr>
-              <a:t>cmake</a:t>
+              <a:t>if</a:t>
             </a:r>
             <a:r>
               <a:rPr sz="1725" b="0">
@@ -23234,15 +23226,15 @@
                 <a:ea typeface="Consolas"/>
                 <a:cs typeface="Consolas"/>
               </a:rPr>
-              <a:t> --build build</a:t>
+              <a:t> </a:t>
             </a:r>
             <a:r>
               <a:rPr>
                 <a:solidFill>
-                  <a:srgbClr val="0070C0"/>
-                </a:solidFill>
-              </a:rPr>
-              <a:t>/learning-tools/cmake-native/out</a:t>
+                  <a:srgbClr val="A02B93"/>
+                </a:solidFill>
+              </a:rPr>
+              <a:t>cmake</a:t>
             </a:r>
             <a:r>
               <a:rPr sz="1725" b="0">
@@ -23253,27 +23245,19 @@
                 <a:ea typeface="Consolas"/>
                 <a:cs typeface="Consolas"/>
               </a:rPr>
-              <a:t> --parallel 4; then</a:t>
-            </a:r>
-          </a:p>
-          <a:p>
-            <a:pPr>
-              <a:lnSpc>
-                <a:spcPct val="120000"/>
-              </a:lnSpc>
-              <a:spcAft>
-                <a:spcPts val="0"/>
-              </a:spcAft>
-              <a:buNone/>
-              <a:defRPr sz="1725" b="0">
-                <a:solidFill>
-                  <a:srgbClr val="29263B"/>
+              <a:t> </a:t>
+            </a:r>
+            <a:r>
+              <a:rPr sz="1725" b="0">
+                <a:solidFill>
+                  <a:srgbClr val="B84E00"/>
                 </a:solidFill>
                 <a:latin typeface="Consolas"/>
                 <a:ea typeface="Consolas"/>
                 <a:cs typeface="Consolas"/>
-              </a:defRPr>
-            </a:pPr>
+              </a:rPr>
+              <a:t>--build</a:t>
+            </a:r>
             <a:r>
               <a:rPr sz="1725" b="0">
                 <a:solidFill>
@@ -23283,35 +23267,27 @@
                 <a:ea typeface="Consolas"/>
                 <a:cs typeface="Consolas"/>
               </a:rPr>
-              <a:t>  .</a:t>
-            </a:r>
-            <a:r>
-              <a:rPr>
+              <a:t> </a:t>
+            </a:r>
+            <a:r>
+              <a:rPr sz="1725" b="0">
                 <a:solidFill>
                   <a:srgbClr val="0070C0"/>
-                </a:solidFill>
-              </a:rPr>
-              <a:t>/build/learning-tools/cmake-native/out/my_app.exe</a:t>
-            </a:r>
-          </a:p>
-          <a:p>
-            <a:pPr>
-              <a:lnSpc>
-                <a:spcPct val="120000"/>
-              </a:lnSpc>
-              <a:spcAft>
-                <a:spcPts val="0"/>
-              </a:spcAft>
-              <a:buNone/>
-              <a:defRPr sz="1725" b="0">
-                <a:solidFill>
-                  <a:srgbClr val="29263B"/>
                 </a:solidFill>
                 <a:latin typeface="Consolas"/>
                 <a:ea typeface="Consolas"/>
                 <a:cs typeface="Consolas"/>
-              </a:defRPr>
-            </a:pPr>
+              </a:rPr>
+              <a:t>build</a:t>
+            </a:r>
+            <a:r>
+              <a:rPr>
+                <a:solidFill>
+                  <a:srgbClr val="0070C0"/>
+                </a:solidFill>
+              </a:rPr>
+              <a:t>/learning-tools/cmake-native/out</a:t>
+            </a:r>
             <a:r>
               <a:rPr sz="1725" b="0">
                 <a:solidFill>
@@ -23321,27 +23297,19 @@
                 <a:ea typeface="Consolas"/>
                 <a:cs typeface="Consolas"/>
               </a:rPr>
-              <a:t>else</a:t>
-            </a:r>
-          </a:p>
-          <a:p>
-            <a:pPr>
-              <a:lnSpc>
-                <a:spcPct val="120000"/>
-              </a:lnSpc>
-              <a:spcAft>
-                <a:spcPts val="0"/>
-              </a:spcAft>
-              <a:buNone/>
-              <a:defRPr sz="1725" b="0">
-                <a:solidFill>
-                  <a:srgbClr val="29263B"/>
+              <a:t> </a:t>
+            </a:r>
+            <a:r>
+              <a:rPr sz="1725" b="0">
+                <a:solidFill>
+                  <a:srgbClr val="B84E00"/>
                 </a:solidFill>
                 <a:latin typeface="Consolas"/>
                 <a:ea typeface="Consolas"/>
                 <a:cs typeface="Consolas"/>
-              </a:defRPr>
-            </a:pPr>
+              </a:rPr>
+              <a:t>--parallel</a:t>
+            </a:r>
             <a:r>
               <a:rPr sz="1725" b="0">
                 <a:solidFill>
@@ -23351,26 +23319,18 @@
                 <a:ea typeface="Consolas"/>
                 <a:cs typeface="Consolas"/>
               </a:rPr>
-              <a:t>  </a:t>
-            </a:r>
-            <a:r>
-              <a:rPr>
+              <a:t> 4; </a:t>
+            </a:r>
+            <a:r>
+              <a:rPr sz="1725" b="0">
                 <a:solidFill>
                   <a:srgbClr val="A02B93"/>
-                </a:solidFill>
-              </a:rPr>
-              <a:t>printf</a:t>
-            </a:r>
-            <a:r>
-              <a:rPr sz="1725" b="0">
-                <a:solidFill>
-                  <a:srgbClr val="29263B"/>
                 </a:solidFill>
                 <a:latin typeface="Consolas"/>
                 <a:ea typeface="Consolas"/>
                 <a:cs typeface="Consolas"/>
               </a:rPr>
-              <a:t> '%s\n' '构建失败，先检查错误。'</a:t>
+              <a:t>then</a:t>
             </a:r>
           </a:p>
           <a:p>
@@ -23395,6 +23355,134 @@
               <a:rPr sz="1725" b="0">
                 <a:solidFill>
                   <a:srgbClr val="29263B"/>
+                </a:solidFill>
+                <a:latin typeface="Consolas"/>
+                <a:ea typeface="Consolas"/>
+                <a:cs typeface="Consolas"/>
+              </a:rPr>
+              <a:t>  </a:t>
+            </a:r>
+            <a:r>
+              <a:rPr sz="1725" b="0">
+                <a:solidFill>
+                  <a:srgbClr val="0070C0"/>
+                </a:solidFill>
+                <a:latin typeface="Consolas"/>
+                <a:ea typeface="Consolas"/>
+                <a:cs typeface="Consolas"/>
+              </a:rPr>
+              <a:t>.</a:t>
+            </a:r>
+            <a:r>
+              <a:rPr>
+                <a:solidFill>
+                  <a:srgbClr val="0070C0"/>
+                </a:solidFill>
+              </a:rPr>
+              <a:t>/build/learning-tools/cmake-native/out/my_app.exe</a:t>
+            </a:r>
+          </a:p>
+          <a:p>
+            <a:pPr>
+              <a:lnSpc>
+                <a:spcPct val="120000"/>
+              </a:lnSpc>
+              <a:spcAft>
+                <a:spcPts val="0"/>
+              </a:spcAft>
+              <a:buNone/>
+              <a:defRPr sz="1725" b="0">
+                <a:solidFill>
+                  <a:srgbClr val="29263B"/>
+                </a:solidFill>
+                <a:latin typeface="Consolas"/>
+                <a:ea typeface="Consolas"/>
+                <a:cs typeface="Consolas"/>
+              </a:defRPr>
+            </a:pPr>
+            <a:r>
+              <a:rPr sz="1725" b="0">
+                <a:solidFill>
+                  <a:srgbClr val="A02B93"/>
+                </a:solidFill>
+                <a:latin typeface="Consolas"/>
+                <a:ea typeface="Consolas"/>
+                <a:cs typeface="Consolas"/>
+              </a:rPr>
+              <a:t>else</a:t>
+            </a:r>
+          </a:p>
+          <a:p>
+            <a:pPr>
+              <a:lnSpc>
+                <a:spcPct val="120000"/>
+              </a:lnSpc>
+              <a:spcAft>
+                <a:spcPts val="0"/>
+              </a:spcAft>
+              <a:buNone/>
+              <a:defRPr sz="1725" b="0">
+                <a:solidFill>
+                  <a:srgbClr val="29263B"/>
+                </a:solidFill>
+                <a:latin typeface="Consolas"/>
+                <a:ea typeface="Consolas"/>
+                <a:cs typeface="Consolas"/>
+              </a:defRPr>
+            </a:pPr>
+            <a:r>
+              <a:rPr sz="1725" b="0">
+                <a:solidFill>
+                  <a:srgbClr val="29263B"/>
+                </a:solidFill>
+                <a:latin typeface="Consolas"/>
+                <a:ea typeface="Consolas"/>
+                <a:cs typeface="Consolas"/>
+              </a:rPr>
+              <a:t>  </a:t>
+            </a:r>
+            <a:r>
+              <a:rPr>
+                <a:solidFill>
+                  <a:srgbClr val="A02B93"/>
+                </a:solidFill>
+              </a:rPr>
+              <a:t>printf</a:t>
+            </a:r>
+            <a:r>
+              <a:rPr sz="1725" b="0">
+                <a:solidFill>
+                  <a:srgbClr val="29263B"/>
+                </a:solidFill>
+                <a:latin typeface="Consolas"/>
+                <a:ea typeface="Consolas"/>
+                <a:cs typeface="Consolas"/>
+              </a:rPr>
+              <a:t> '%s\n' '构建失败，先检查错误。'</a:t>
+            </a:r>
+          </a:p>
+          <a:p>
+            <a:pPr>
+              <a:lnSpc>
+                <a:spcPct val="120000"/>
+              </a:lnSpc>
+              <a:spcAft>
+                <a:spcPts val="0"/>
+              </a:spcAft>
+              <a:buNone/>
+              <a:defRPr sz="1725" b="0">
+                <a:solidFill>
+                  <a:srgbClr val="29263B"/>
+                </a:solidFill>
+                <a:latin typeface="Consolas"/>
+                <a:ea typeface="Consolas"/>
+                <a:cs typeface="Consolas"/>
+              </a:defRPr>
+            </a:pPr>
+            <a:r>
+              <a:rPr sz="1725" b="0">
+                <a:solidFill>
+                  <a:srgbClr val="A02B93"/>
                 </a:solidFill>
                 <a:latin typeface="Consolas"/>
                 <a:ea typeface="Consolas"/>
@@ -23575,7 +23663,16 @@
               <a:rPr u="sng">
                 <a:hlinkClick r:id="rId3"/>
               </a:rPr>
-              <a:t>依据：CMake 帮助：manual/cmake-buildsystem.7.rst</a:t>
+              <a:t>依据：CMake 帮助：manual/cmake-</a:t>
+            </a:r>
+            <a:r>
+              <a:rPr u="sng">
+                <a:solidFill>
+                  <a:srgbClr val="0070C0"/>
+                </a:solidFill>
+                <a:hlinkClick r:id="rId3"/>
+              </a:rPr>
+              <a:t>buildsystem.7.rst</a:t>
             </a:r>
           </a:p>
         </p:txBody>
@@ -24014,7 +24111,29 @@
                 <a:ea typeface="Microsoft YaHei"/>
                 <a:cs typeface="Microsoft YaHei"/>
               </a:rPr>
-              <a:t>磁盘上新建 foo.c 不代表它自动参与构建。</a:t>
+              <a:t>磁盘上新建 </a:t>
+            </a:r>
+            <a:r>
+              <a:rPr sz="1950" b="0">
+                <a:solidFill>
+                  <a:srgbClr val="0070C0"/>
+                </a:solidFill>
+                <a:latin typeface="Microsoft YaHei"/>
+                <a:ea typeface="Microsoft YaHei"/>
+                <a:cs typeface="Microsoft YaHei"/>
+              </a:rPr>
+              <a:t>foo.c</a:t>
+            </a:r>
+            <a:r>
+              <a:rPr sz="1950" b="0">
+                <a:solidFill>
+                  <a:srgbClr val="29263B"/>
+                </a:solidFill>
+                <a:latin typeface="Microsoft YaHei"/>
+                <a:ea typeface="Microsoft YaHei"/>
+                <a:cs typeface="Microsoft YaHei"/>
+              </a:rPr>
+              <a:t> 不代表它自动参与构建。</a:t>
             </a:r>
           </a:p>
         </p:txBody>
@@ -24842,7 +24961,16 @@
               <a:rPr u="sng">
                 <a:hlinkClick r:id="rId3"/>
               </a:rPr>
-              <a:t>依据：CMake 帮助：manual/cmake-buildsystem.7.rst</a:t>
+              <a:t>依据：CMake 帮助：manual/cmake-</a:t>
+            </a:r>
+            <a:r>
+              <a:rPr u="sng">
+                <a:solidFill>
+                  <a:srgbClr val="0070C0"/>
+                </a:solidFill>
+                <a:hlinkClick r:id="rId3"/>
+              </a:rPr>
+              <a:t>buildsystem.7.rst</a:t>
             </a:r>
           </a:p>
         </p:txBody>
@@ -25259,34 +25387,18 @@
                 <a:ea typeface="Consolas"/>
                 <a:cs typeface="Consolas"/>
               </a:rPr>
-              <a:t>(VERSION 3.28)</a:t>
-            </a:r>
-          </a:p>
-          <a:p>
-            <a:pPr>
-              <a:lnSpc>
-                <a:spcPct val="120000"/>
-              </a:lnSpc>
-              <a:spcAft>
-                <a:spcPts val="0"/>
-              </a:spcAft>
-              <a:buNone/>
-              <a:defRPr sz="1725" b="0">
-                <a:solidFill>
-                  <a:srgbClr val="29263B"/>
+              <a:t>(</a:t>
+            </a:r>
+            <a:r>
+              <a:rPr sz="1725" b="0">
+                <a:solidFill>
+                  <a:srgbClr val="B84E00"/>
                 </a:solidFill>
                 <a:latin typeface="Consolas"/>
                 <a:ea typeface="Consolas"/>
                 <a:cs typeface="Consolas"/>
-              </a:defRPr>
-            </a:pPr>
-            <a:r>
-              <a:rPr>
-                <a:solidFill>
-                  <a:srgbClr val="087B3D"/>
-                </a:solidFill>
-              </a:rPr>
-              <a:t>project</a:t>
+              </a:rPr>
+              <a:t>VERSION</a:t>
             </a:r>
             <a:r>
               <a:rPr sz="1725" b="0">
@@ -25297,7 +25409,7 @@
                 <a:ea typeface="Consolas"/>
                 <a:cs typeface="Consolas"/>
               </a:rPr>
-              <a:t>(native_demo LANGUAGES C)</a:t>
+              <a:t> 3.28)</a:t>
             </a:r>
           </a:p>
           <a:p>
@@ -25324,7 +25436,7 @@
                   <a:srgbClr val="087B3D"/>
                 </a:solidFill>
               </a:rPr>
-              <a:t>add_executable</a:t>
+              <a:t>project</a:t>
             </a:r>
             <a:r>
               <a:rPr sz="1725" b="0">
@@ -25335,34 +25447,18 @@
                 <a:ea typeface="Consolas"/>
                 <a:cs typeface="Consolas"/>
               </a:rPr>
-              <a:t>(my_app)</a:t>
-            </a:r>
-          </a:p>
-          <a:p>
-            <a:pPr>
-              <a:lnSpc>
-                <a:spcPct val="120000"/>
-              </a:lnSpc>
-              <a:spcAft>
-                <a:spcPts val="0"/>
-              </a:spcAft>
-              <a:buNone/>
-              <a:defRPr sz="1725" b="0">
-                <a:solidFill>
-                  <a:srgbClr val="29263B"/>
+              <a:t>(native_demo </a:t>
+            </a:r>
+            <a:r>
+              <a:rPr sz="1725" b="0">
+                <a:solidFill>
+                  <a:srgbClr val="B84E00"/>
                 </a:solidFill>
                 <a:latin typeface="Consolas"/>
                 <a:ea typeface="Consolas"/>
                 <a:cs typeface="Consolas"/>
-              </a:defRPr>
-            </a:pPr>
-            <a:r>
-              <a:rPr>
-                <a:solidFill>
-                  <a:srgbClr val="087B3D"/>
-                </a:solidFill>
-              </a:rPr>
-              <a:t>target_sources</a:t>
+              </a:rPr>
+              <a:t>LANGUAGES</a:t>
             </a:r>
             <a:r>
               <a:rPr sz="1725" b="0">
@@ -25373,26 +25469,124 @@
                 <a:ea typeface="Consolas"/>
                 <a:cs typeface="Consolas"/>
               </a:rPr>
-              <a:t>(my_app </a:t>
-            </a:r>
-            <a:r>
-              <a:rPr>
-                <a:solidFill>
-                  <a:srgbClr val="B84E00"/>
-                </a:solidFill>
-              </a:rPr>
-              <a:t>PRIVATE</a:t>
-            </a:r>
-            <a:r>
-              <a:rPr sz="1725" b="0">
+              <a:t> C)</a:t>
+            </a:r>
+          </a:p>
+          <a:p>
+            <a:pPr>
+              <a:lnSpc>
+                <a:spcPct val="120000"/>
+              </a:lnSpc>
+              <a:spcAft>
+                <a:spcPts val="0"/>
+              </a:spcAft>
+              <a:buNone/>
+              <a:defRPr sz="1725" b="0">
                 <a:solidFill>
                   <a:srgbClr val="29263B"/>
                 </a:solidFill>
                 <a:latin typeface="Consolas"/>
                 <a:ea typeface="Consolas"/>
                 <a:cs typeface="Consolas"/>
-              </a:rPr>
-              <a:t> main.c)</a:t>
+              </a:defRPr>
+            </a:pPr>
+            <a:r>
+              <a:rPr>
+                <a:solidFill>
+                  <a:srgbClr val="087B3D"/>
+                </a:solidFill>
+              </a:rPr>
+              <a:t>add_executable</a:t>
+            </a:r>
+            <a:r>
+              <a:rPr sz="1725" b="0">
+                <a:solidFill>
+                  <a:srgbClr val="29263B"/>
+                </a:solidFill>
+                <a:latin typeface="Consolas"/>
+                <a:ea typeface="Consolas"/>
+                <a:cs typeface="Consolas"/>
+              </a:rPr>
+              <a:t>(my_app)</a:t>
+            </a:r>
+          </a:p>
+          <a:p>
+            <a:pPr>
+              <a:lnSpc>
+                <a:spcPct val="120000"/>
+              </a:lnSpc>
+              <a:spcAft>
+                <a:spcPts val="0"/>
+              </a:spcAft>
+              <a:buNone/>
+              <a:defRPr sz="1725" b="0">
+                <a:solidFill>
+                  <a:srgbClr val="29263B"/>
+                </a:solidFill>
+                <a:latin typeface="Consolas"/>
+                <a:ea typeface="Consolas"/>
+                <a:cs typeface="Consolas"/>
+              </a:defRPr>
+            </a:pPr>
+            <a:r>
+              <a:rPr>
+                <a:solidFill>
+                  <a:srgbClr val="087B3D"/>
+                </a:solidFill>
+              </a:rPr>
+              <a:t>target_sources</a:t>
+            </a:r>
+            <a:r>
+              <a:rPr sz="1725" b="0">
+                <a:solidFill>
+                  <a:srgbClr val="29263B"/>
+                </a:solidFill>
+                <a:latin typeface="Consolas"/>
+                <a:ea typeface="Consolas"/>
+                <a:cs typeface="Consolas"/>
+              </a:rPr>
+              <a:t>(my_app </a:t>
+            </a:r>
+            <a:r>
+              <a:rPr>
+                <a:solidFill>
+                  <a:srgbClr val="B84E00"/>
+                </a:solidFill>
+              </a:rPr>
+              <a:t>PRIVATE</a:t>
+            </a:r>
+            <a:r>
+              <a:rPr sz="1725" b="0">
+                <a:solidFill>
+                  <a:srgbClr val="29263B"/>
+                </a:solidFill>
+                <a:latin typeface="Consolas"/>
+                <a:ea typeface="Consolas"/>
+                <a:cs typeface="Consolas"/>
+              </a:rPr>
+              <a:t> </a:t>
+            </a:r>
+            <a:r>
+              <a:rPr sz="1725" b="0">
+                <a:solidFill>
+                  <a:srgbClr val="0070C0"/>
+                </a:solidFill>
+                <a:latin typeface="Consolas"/>
+                <a:ea typeface="Consolas"/>
+                <a:cs typeface="Consolas"/>
+              </a:rPr>
+              <a:t>main.c</a:t>
+            </a:r>
+            <a:r>
+              <a:rPr sz="1725" b="0">
+                <a:solidFill>
+                  <a:srgbClr val="29263B"/>
+                </a:solidFill>
+                <a:latin typeface="Consolas"/>
+                <a:ea typeface="Consolas"/>
+                <a:cs typeface="Consolas"/>
+              </a:rPr>
+              <a:t>)</a:t>
             </a:r>
           </a:p>
         </p:txBody>
@@ -25583,7 +25777,16 @@
               <a:rPr u="sng">
                 <a:hlinkClick r:id="rId3"/>
               </a:rPr>
-              <a:t>依据：CMake 帮助：manual/cmake-buildsystem.7.rst</a:t>
+              <a:t>依据：CMake 帮助：manual/cmake-</a:t>
+            </a:r>
+            <a:r>
+              <a:rPr u="sng">
+                <a:solidFill>
+                  <a:srgbClr val="0070C0"/>
+                </a:solidFill>
+                <a:hlinkClick r:id="rId3"/>
+              </a:rPr>
+              <a:t>buildsystem.7.rst</a:t>
             </a:r>
           </a:p>
         </p:txBody>
@@ -25992,7 +26195,73 @@
                 <a:ea typeface="Microsoft YaHei"/>
                 <a:cs typeface="Microsoft YaHei"/>
               </a:rPr>
-              <a:t>新建 include/add.h、src/add.c；更新 main.c 调用 add(2, 3)。</a:t>
+              <a:t>新建 </a:t>
+            </a:r>
+            <a:r>
+              <a:rPr sz="1950" b="0">
+                <a:solidFill>
+                  <a:srgbClr val="0070C0"/>
+                </a:solidFill>
+                <a:latin typeface="Microsoft YaHei"/>
+                <a:ea typeface="Microsoft YaHei"/>
+                <a:cs typeface="Microsoft YaHei"/>
+              </a:rPr>
+              <a:t>include/add.h</a:t>
+            </a:r>
+            <a:r>
+              <a:rPr sz="1950" b="0">
+                <a:solidFill>
+                  <a:srgbClr val="29263B"/>
+                </a:solidFill>
+                <a:latin typeface="Microsoft YaHei"/>
+                <a:ea typeface="Microsoft YaHei"/>
+                <a:cs typeface="Microsoft YaHei"/>
+              </a:rPr>
+              <a:t>、</a:t>
+            </a:r>
+            <a:r>
+              <a:rPr sz="1950" b="0">
+                <a:solidFill>
+                  <a:srgbClr val="0070C0"/>
+                </a:solidFill>
+                <a:latin typeface="Microsoft YaHei"/>
+                <a:ea typeface="Microsoft YaHei"/>
+                <a:cs typeface="Microsoft YaHei"/>
+              </a:rPr>
+              <a:t>src/add.c</a:t>
+            </a:r>
+            <a:r>
+              <a:rPr sz="1950" b="0">
+                <a:solidFill>
+                  <a:srgbClr val="29263B"/>
+                </a:solidFill>
+                <a:latin typeface="Microsoft YaHei"/>
+                <a:ea typeface="Microsoft YaHei"/>
+                <a:cs typeface="Microsoft YaHei"/>
+              </a:rPr>
+              <a:t>；更新 </a:t>
+            </a:r>
+            <a:r>
+              <a:rPr sz="1950" b="0">
+                <a:solidFill>
+                  <a:srgbClr val="0070C0"/>
+                </a:solidFill>
+                <a:latin typeface="Microsoft YaHei"/>
+                <a:ea typeface="Microsoft YaHei"/>
+                <a:cs typeface="Microsoft YaHei"/>
+              </a:rPr>
+              <a:t>main.c</a:t>
+            </a:r>
+            <a:r>
+              <a:rPr sz="1950" b="0">
+                <a:solidFill>
+                  <a:srgbClr val="29263B"/>
+                </a:solidFill>
+                <a:latin typeface="Microsoft YaHei"/>
+                <a:ea typeface="Microsoft YaHei"/>
+                <a:cs typeface="Microsoft YaHei"/>
+              </a:rPr>
+              <a:t> 调用 add(2, 3)。</a:t>
             </a:r>
           </a:p>
           <a:p>
@@ -26022,7 +26291,29 @@
                 <a:ea typeface="Microsoft YaHei"/>
                 <a:cs typeface="Microsoft YaHei"/>
               </a:rPr>
-              <a:t>四份完整文件见 MD 与配套 labs/cmake_native/02_targets。</a:t>
+              <a:t>四份完整文件见 MD 与配套 </a:t>
+            </a:r>
+            <a:r>
+              <a:rPr sz="1950" b="0">
+                <a:solidFill>
+                  <a:srgbClr val="0070C0"/>
+                </a:solidFill>
+                <a:latin typeface="Microsoft YaHei"/>
+                <a:ea typeface="Microsoft YaHei"/>
+                <a:cs typeface="Microsoft YaHei"/>
+              </a:rPr>
+              <a:t>labs/cmake_native/02_targets</a:t>
+            </a:r>
+            <a:r>
+              <a:rPr sz="1950" b="0">
+                <a:solidFill>
+                  <a:srgbClr val="29263B"/>
+                </a:solidFill>
+                <a:latin typeface="Microsoft YaHei"/>
+                <a:ea typeface="Microsoft YaHei"/>
+                <a:cs typeface="Microsoft YaHei"/>
+              </a:rPr>
+              <a:t>。</a:t>
             </a:r>
           </a:p>
           <a:p>
@@ -26120,13 +26411,24 @@
             <a:r>
               <a:rPr sz="1725">
                 <a:solidFill>
-                  <a:srgbClr val="29263B"/>
-                </a:solidFill>
-                <a:latin typeface="Microsoft YaHei"/>
-                <a:ea typeface="Microsoft YaHei"/>
-                <a:cs typeface="Microsoft YaHei"/>
-              </a:rPr>
-              <a:t>add.h 声明</a:t>
+                  <a:srgbClr val="0070C0"/>
+                </a:solidFill>
+                <a:latin typeface="Microsoft YaHei"/>
+                <a:ea typeface="Microsoft YaHei"/>
+                <a:cs typeface="Microsoft YaHei"/>
+              </a:rPr>
+              <a:t>add.h</a:t>
+            </a:r>
+            <a:r>
+              <a:rPr sz="1725">
+                <a:solidFill>
+                  <a:srgbClr val="29263B"/>
+                </a:solidFill>
+                <a:latin typeface="Microsoft YaHei"/>
+                <a:ea typeface="Microsoft YaHei"/>
+                <a:cs typeface="Microsoft YaHei"/>
+              </a:rPr>
+              <a:t> 声明</a:t>
             </a:r>
           </a:p>
         </p:txBody>
@@ -26269,13 +26571,24 @@
             <a:r>
               <a:rPr sz="1725">
                 <a:solidFill>
-                  <a:srgbClr val="29263B"/>
-                </a:solidFill>
-                <a:latin typeface="Microsoft YaHei"/>
-                <a:ea typeface="Microsoft YaHei"/>
-                <a:cs typeface="Microsoft YaHei"/>
-              </a:rPr>
-              <a:t>add.c 实现</a:t>
+                  <a:srgbClr val="0070C0"/>
+                </a:solidFill>
+                <a:latin typeface="Microsoft YaHei"/>
+                <a:ea typeface="Microsoft YaHei"/>
+                <a:cs typeface="Microsoft YaHei"/>
+              </a:rPr>
+              <a:t>add.c</a:t>
+            </a:r>
+            <a:r>
+              <a:rPr sz="1725">
+                <a:solidFill>
+                  <a:srgbClr val="29263B"/>
+                </a:solidFill>
+                <a:latin typeface="Microsoft YaHei"/>
+                <a:ea typeface="Microsoft YaHei"/>
+                <a:cs typeface="Microsoft YaHei"/>
+              </a:rPr>
+              <a:t> 实现</a:t>
             </a:r>
           </a:p>
         </p:txBody>
@@ -26643,7 +26956,16 @@
               <a:rPr u="sng">
                 <a:hlinkClick r:id="rId3"/>
               </a:rPr>
-              <a:t>依据：CMake 帮助：manual/cmake-buildsystem.7.rst</a:t>
+              <a:t>依据：CMake 帮助：manual/cmake-</a:t>
+            </a:r>
+            <a:r>
+              <a:rPr u="sng">
+                <a:solidFill>
+                  <a:srgbClr val="0070C0"/>
+                </a:solidFill>
+                <a:hlinkClick r:id="rId3"/>
+              </a:rPr>
+              <a:t>buildsystem.7.rst</a:t>
             </a:r>
           </a:p>
         </p:txBody>
@@ -27060,34 +27382,18 @@
                 <a:ea typeface="Consolas"/>
                 <a:cs typeface="Consolas"/>
               </a:rPr>
-              <a:t>(VERSION 3.28)</a:t>
-            </a:r>
-          </a:p>
-          <a:p>
-            <a:pPr>
-              <a:lnSpc>
-                <a:spcPct val="120000"/>
-              </a:lnSpc>
-              <a:spcAft>
-                <a:spcPts val="0"/>
-              </a:spcAft>
-              <a:buNone/>
-              <a:defRPr sz="1725" b="0">
-                <a:solidFill>
-                  <a:srgbClr val="29263B"/>
+              <a:t>(</a:t>
+            </a:r>
+            <a:r>
+              <a:rPr sz="1725" b="0">
+                <a:solidFill>
+                  <a:srgbClr val="B84E00"/>
                 </a:solidFill>
                 <a:latin typeface="Consolas"/>
                 <a:ea typeface="Consolas"/>
                 <a:cs typeface="Consolas"/>
-              </a:defRPr>
-            </a:pPr>
-            <a:r>
-              <a:rPr>
-                <a:solidFill>
-                  <a:srgbClr val="087B3D"/>
-                </a:solidFill>
-              </a:rPr>
-              <a:t>project</a:t>
+              </a:rPr>
+              <a:t>VERSION</a:t>
             </a:r>
             <a:r>
               <a:rPr sz="1725" b="0">
@@ -27098,7 +27404,7 @@
                 <a:ea typeface="Consolas"/>
                 <a:cs typeface="Consolas"/>
               </a:rPr>
-              <a:t>(native_demo LANGUAGES C)</a:t>
+              <a:t> 3.28)</a:t>
             </a:r>
           </a:p>
           <a:p>
@@ -27125,7 +27431,7 @@
                   <a:srgbClr val="087B3D"/>
                 </a:solidFill>
               </a:rPr>
-              <a:t>add_library</a:t>
+              <a:t>project</a:t>
             </a:r>
             <a:r>
               <a:rPr sz="1725" b="0">
@@ -27136,110 +27442,86 @@
                 <a:ea typeface="Consolas"/>
                 <a:cs typeface="Consolas"/>
               </a:rPr>
-              <a:t>(arithmetic STATIC src</a:t>
-            </a:r>
-            <a:r>
-              <a:rPr>
-                <a:solidFill>
-                  <a:srgbClr val="0070C0"/>
-                </a:solidFill>
-              </a:rPr>
-              <a:t>/add.c</a:t>
+              <a:t>(native_demo </a:t>
             </a:r>
             <a:r>
               <a:rPr sz="1725" b="0">
                 <a:solidFill>
-                  <a:srgbClr val="29263B"/>
+                  <a:srgbClr val="B84E00"/>
                 </a:solidFill>
                 <a:latin typeface="Consolas"/>
                 <a:ea typeface="Consolas"/>
                 <a:cs typeface="Consolas"/>
               </a:rPr>
-              <a:t>)</a:t>
-            </a:r>
-          </a:p>
-          <a:p>
-            <a:pPr>
-              <a:lnSpc>
-                <a:spcPct val="120000"/>
-              </a:lnSpc>
-              <a:spcAft>
-                <a:spcPts val="0"/>
-              </a:spcAft>
-              <a:buNone/>
-              <a:defRPr sz="1725" b="0">
+              <a:t>LANGUAGES</a:t>
+            </a:r>
+            <a:r>
+              <a:rPr sz="1725" b="0">
                 <a:solidFill>
                   <a:srgbClr val="29263B"/>
                 </a:solidFill>
                 <a:latin typeface="Consolas"/>
                 <a:ea typeface="Consolas"/>
                 <a:cs typeface="Consolas"/>
-              </a:defRPr>
-            </a:pPr>
-            <a:r>
-              <a:rPr>
-                <a:solidFill>
-                  <a:srgbClr val="087B3D"/>
-                </a:solidFill>
-              </a:rPr>
-              <a:t>target_include_directories</a:t>
-            </a:r>
-            <a:r>
-              <a:rPr sz="1725" b="0">
+              </a:rPr>
+              <a:t> C)</a:t>
+            </a:r>
+          </a:p>
+          <a:p>
+            <a:pPr>
+              <a:lnSpc>
+                <a:spcPct val="120000"/>
+              </a:lnSpc>
+              <a:spcAft>
+                <a:spcPts val="0"/>
+              </a:spcAft>
+              <a:buNone/>
+              <a:defRPr sz="1725" b="0">
                 <a:solidFill>
                   <a:srgbClr val="29263B"/>
                 </a:solidFill>
                 <a:latin typeface="Consolas"/>
                 <a:ea typeface="Consolas"/>
                 <a:cs typeface="Consolas"/>
-              </a:rPr>
-              <a:t>(arithmetic </a:t>
-            </a:r>
+              </a:defRPr>
+            </a:pPr>
             <a:r>
               <a:rPr>
                 <a:solidFill>
-                  <a:srgbClr val="B84E00"/>
-                </a:solidFill>
-              </a:rPr>
-              <a:t>PUBLIC</a:t>
-            </a:r>
-          </a:p>
-          <a:p>
-            <a:pPr>
-              <a:lnSpc>
-                <a:spcPct val="120000"/>
-              </a:lnSpc>
-              <a:spcAft>
-                <a:spcPts val="0"/>
-              </a:spcAft>
-              <a:buNone/>
-              <a:defRPr sz="1725" b="0">
+                  <a:srgbClr val="087B3D"/>
+                </a:solidFill>
+              </a:rPr>
+              <a:t>add_library</a:t>
+            </a:r>
+            <a:r>
+              <a:rPr sz="1725" b="0">
                 <a:solidFill>
                   <a:srgbClr val="29263B"/>
                 </a:solidFill>
                 <a:latin typeface="Consolas"/>
                 <a:ea typeface="Consolas"/>
                 <a:cs typeface="Consolas"/>
-              </a:defRPr>
-            </a:pPr>
+              </a:rPr>
+              <a:t>(arithmetic STATIC </a:t>
+            </a:r>
             <a:r>
               <a:rPr sz="1725" b="0">
                 <a:solidFill>
-                  <a:srgbClr val="29263B"/>
+                  <a:srgbClr val="0070C0"/>
                 </a:solidFill>
                 <a:latin typeface="Consolas"/>
                 <a:ea typeface="Consolas"/>
                 <a:cs typeface="Consolas"/>
               </a:rPr>
-              <a:t>  "${</a:t>
+              <a:t>src</a:t>
             </a:r>
             <a:r>
               <a:rPr>
                 <a:solidFill>
-                  <a:srgbClr val="B84E00"/>
-                </a:solidFill>
-              </a:rPr>
-              <a:t>CMAKE_CURRENT_SOURCE_DIR</a:t>
+                  <a:srgbClr val="0070C0"/>
+                </a:solidFill>
+              </a:rPr>
+              <a:t>/add.c</a:t>
             </a:r>
             <a:r>
               <a:rPr sz="1725" b="0">
@@ -27250,64 +27532,192 @@
                 <a:ea typeface="Consolas"/>
                 <a:cs typeface="Consolas"/>
               </a:rPr>
-              <a:t>}</a:t>
-            </a:r>
-            <a:r>
-              <a:rPr>
-                <a:solidFill>
-                  <a:srgbClr val="0070C0"/>
-                </a:solidFill>
-              </a:rPr>
-              <a:t>/include</a:t>
-            </a:r>
-            <a:r>
-              <a:rPr sz="1725" b="0">
+              <a:t>)</a:t>
+            </a:r>
+          </a:p>
+          <a:p>
+            <a:pPr>
+              <a:lnSpc>
+                <a:spcPct val="120000"/>
+              </a:lnSpc>
+              <a:spcAft>
+                <a:spcPts val="0"/>
+              </a:spcAft>
+              <a:buNone/>
+              <a:defRPr sz="1725" b="0">
                 <a:solidFill>
                   <a:srgbClr val="29263B"/>
                 </a:solidFill>
                 <a:latin typeface="Consolas"/>
                 <a:ea typeface="Consolas"/>
                 <a:cs typeface="Consolas"/>
-              </a:rPr>
-              <a:t>")</a:t>
-            </a:r>
-          </a:p>
-          <a:p>
-            <a:pPr>
-              <a:lnSpc>
-                <a:spcPct val="120000"/>
-              </a:lnSpc>
-              <a:spcAft>
-                <a:spcPts val="0"/>
-              </a:spcAft>
-              <a:buNone/>
-              <a:defRPr sz="1725" b="0">
+              </a:defRPr>
+            </a:pPr>
+            <a:r>
+              <a:rPr>
+                <a:solidFill>
+                  <a:srgbClr val="087B3D"/>
+                </a:solidFill>
+              </a:rPr>
+              <a:t>target_include_directories</a:t>
+            </a:r>
+            <a:r>
+              <a:rPr sz="1725" b="0">
                 <a:solidFill>
                   <a:srgbClr val="29263B"/>
                 </a:solidFill>
                 <a:latin typeface="Consolas"/>
                 <a:ea typeface="Consolas"/>
                 <a:cs typeface="Consolas"/>
-              </a:defRPr>
-            </a:pPr>
+              </a:rPr>
+              <a:t>(arithmetic </a:t>
+            </a:r>
             <a:r>
               <a:rPr>
                 <a:solidFill>
-                  <a:srgbClr val="087B3D"/>
-                </a:solidFill>
-              </a:rPr>
-              <a:t>add_executable</a:t>
-            </a:r>
-            <a:r>
-              <a:rPr sz="1725" b="0">
+                  <a:srgbClr val="B84E00"/>
+                </a:solidFill>
+              </a:rPr>
+              <a:t>PUBLIC</a:t>
+            </a:r>
+          </a:p>
+          <a:p>
+            <a:pPr>
+              <a:lnSpc>
+                <a:spcPct val="120000"/>
+              </a:lnSpc>
+              <a:spcAft>
+                <a:spcPts val="0"/>
+              </a:spcAft>
+              <a:buNone/>
+              <a:defRPr sz="1725" b="0">
                 <a:solidFill>
                   <a:srgbClr val="29263B"/>
                 </a:solidFill>
                 <a:latin typeface="Consolas"/>
                 <a:ea typeface="Consolas"/>
                 <a:cs typeface="Consolas"/>
-              </a:rPr>
-              <a:t>(my_app main.c)</a:t>
+              </a:defRPr>
+            </a:pPr>
+            <a:r>
+              <a:rPr sz="1725" b="0">
+                <a:solidFill>
+                  <a:srgbClr val="29263B"/>
+                </a:solidFill>
+                <a:latin typeface="Consolas"/>
+                <a:ea typeface="Consolas"/>
+                <a:cs typeface="Consolas"/>
+              </a:rPr>
+              <a:t>  "</a:t>
+            </a:r>
+            <a:r>
+              <a:rPr sz="1725" b="0">
+                <a:solidFill>
+                  <a:srgbClr val="B84E00"/>
+                </a:solidFill>
+                <a:latin typeface="Consolas"/>
+                <a:ea typeface="Consolas"/>
+                <a:cs typeface="Consolas"/>
+              </a:rPr>
+              <a:t>${</a:t>
+            </a:r>
+            <a:r>
+              <a:rPr>
+                <a:solidFill>
+                  <a:srgbClr val="B84E00"/>
+                </a:solidFill>
+              </a:rPr>
+              <a:t>CMAKE_CURRENT_SOURCE_DIR</a:t>
+            </a:r>
+            <a:r>
+              <a:rPr sz="1725" b="0">
+                <a:solidFill>
+                  <a:srgbClr val="B84E00"/>
+                </a:solidFill>
+                <a:latin typeface="Consolas"/>
+                <a:ea typeface="Consolas"/>
+                <a:cs typeface="Consolas"/>
+              </a:rPr>
+              <a:t>}</a:t>
+            </a:r>
+            <a:r>
+              <a:rPr>
+                <a:solidFill>
+                  <a:srgbClr val="0070C0"/>
+                </a:solidFill>
+              </a:rPr>
+              <a:t>/include</a:t>
+            </a:r>
+            <a:r>
+              <a:rPr sz="1725" b="0">
+                <a:solidFill>
+                  <a:srgbClr val="29263B"/>
+                </a:solidFill>
+                <a:latin typeface="Consolas"/>
+                <a:ea typeface="Consolas"/>
+                <a:cs typeface="Consolas"/>
+              </a:rPr>
+              <a:t>")</a:t>
+            </a:r>
+          </a:p>
+          <a:p>
+            <a:pPr>
+              <a:lnSpc>
+                <a:spcPct val="120000"/>
+              </a:lnSpc>
+              <a:spcAft>
+                <a:spcPts val="0"/>
+              </a:spcAft>
+              <a:buNone/>
+              <a:defRPr sz="1725" b="0">
+                <a:solidFill>
+                  <a:srgbClr val="29263B"/>
+                </a:solidFill>
+                <a:latin typeface="Consolas"/>
+                <a:ea typeface="Consolas"/>
+                <a:cs typeface="Consolas"/>
+              </a:defRPr>
+            </a:pPr>
+            <a:r>
+              <a:rPr>
+                <a:solidFill>
+                  <a:srgbClr val="087B3D"/>
+                </a:solidFill>
+              </a:rPr>
+              <a:t>add_executable</a:t>
+            </a:r>
+            <a:r>
+              <a:rPr sz="1725" b="0">
+                <a:solidFill>
+                  <a:srgbClr val="29263B"/>
+                </a:solidFill>
+                <a:latin typeface="Consolas"/>
+                <a:ea typeface="Consolas"/>
+                <a:cs typeface="Consolas"/>
+              </a:rPr>
+              <a:t>(my_app </a:t>
+            </a:r>
+            <a:r>
+              <a:rPr sz="1725" b="0">
+                <a:solidFill>
+                  <a:srgbClr val="0070C0"/>
+                </a:solidFill>
+                <a:latin typeface="Consolas"/>
+                <a:ea typeface="Consolas"/>
+                <a:cs typeface="Consolas"/>
+              </a:rPr>
+              <a:t>main.c</a:t>
+            </a:r>
+            <a:r>
+              <a:rPr sz="1725" b="0">
+                <a:solidFill>
+                  <a:srgbClr val="29263B"/>
+                </a:solidFill>
+                <a:latin typeface="Consolas"/>
+                <a:ea typeface="Consolas"/>
+                <a:cs typeface="Consolas"/>
+              </a:rPr>
+              <a:t>)</a:t>
             </a:r>
           </a:p>
           <a:p>
@@ -27539,7 +27949,16 @@
               <a:rPr u="sng">
                 <a:hlinkClick r:id="rId3"/>
               </a:rPr>
-              <a:t>依据：CMake 帮助：manual/cmake-buildsystem.7.rst</a:t>
+              <a:t>依据：CMake 帮助：manual/cmake-</a:t>
+            </a:r>
+            <a:r>
+              <a:rPr u="sng">
+                <a:solidFill>
+                  <a:srgbClr val="0070C0"/>
+                </a:solidFill>
+                <a:hlinkClick r:id="rId3"/>
+              </a:rPr>
+              <a:t>buildsystem.7.rst</a:t>
             </a:r>
           </a:p>
         </p:txBody>
@@ -27942,13 +28361,24 @@
             <a:r>
               <a:rPr sz="1950" b="0">
                 <a:solidFill>
-                  <a:srgbClr val="29263B"/>
-                </a:solidFill>
-                <a:latin typeface="Microsoft YaHei"/>
-                <a:ea typeface="Microsoft YaHei"/>
-                <a:cs typeface="Microsoft YaHei"/>
-              </a:rPr>
-              <a:t>PRIVATE：给目标自身。</a:t>
+                  <a:srgbClr val="B84E00"/>
+                </a:solidFill>
+                <a:latin typeface="Microsoft YaHei"/>
+                <a:ea typeface="Microsoft YaHei"/>
+                <a:cs typeface="Microsoft YaHei"/>
+              </a:rPr>
+              <a:t>PRIVATE</a:t>
+            </a:r>
+            <a:r>
+              <a:rPr sz="1950" b="0">
+                <a:solidFill>
+                  <a:srgbClr val="29263B"/>
+                </a:solidFill>
+                <a:latin typeface="Microsoft YaHei"/>
+                <a:ea typeface="Microsoft YaHei"/>
+                <a:cs typeface="Microsoft YaHei"/>
+              </a:rPr>
+              <a:t>：给目标自身。</a:t>
             </a:r>
           </a:p>
           <a:p>
@@ -27972,13 +28402,24 @@
             <a:r>
               <a:rPr sz="1950" b="0">
                 <a:solidFill>
-                  <a:srgbClr val="29263B"/>
-                </a:solidFill>
-                <a:latin typeface="Microsoft YaHei"/>
-                <a:ea typeface="Microsoft YaHei"/>
-                <a:cs typeface="Microsoft YaHei"/>
-              </a:rPr>
-              <a:t>PUBLIC：给目标自身，也给使用者。</a:t>
+                  <a:srgbClr val="B84E00"/>
+                </a:solidFill>
+                <a:latin typeface="Microsoft YaHei"/>
+                <a:ea typeface="Microsoft YaHei"/>
+                <a:cs typeface="Microsoft YaHei"/>
+              </a:rPr>
+              <a:t>PUBLIC</a:t>
+            </a:r>
+            <a:r>
+              <a:rPr sz="1950" b="0">
+                <a:solidFill>
+                  <a:srgbClr val="29263B"/>
+                </a:solidFill>
+                <a:latin typeface="Microsoft YaHei"/>
+                <a:ea typeface="Microsoft YaHei"/>
+                <a:cs typeface="Microsoft YaHei"/>
+              </a:rPr>
+              <a:t>：给目标自身，也给使用者。</a:t>
             </a:r>
           </a:p>
           <a:p>
@@ -28002,13 +28443,24 @@
             <a:r>
               <a:rPr sz="1950" b="0">
                 <a:solidFill>
-                  <a:srgbClr val="29263B"/>
-                </a:solidFill>
-                <a:latin typeface="Microsoft YaHei"/>
-                <a:ea typeface="Microsoft YaHei"/>
-                <a:cs typeface="Microsoft YaHei"/>
-              </a:rPr>
-              <a:t>INTERFACE：只给使用者。</a:t>
+                  <a:srgbClr val="B84E00"/>
+                </a:solidFill>
+                <a:latin typeface="Microsoft YaHei"/>
+                <a:ea typeface="Microsoft YaHei"/>
+                <a:cs typeface="Microsoft YaHei"/>
+              </a:rPr>
+              <a:t>INTERFACE</a:t>
+            </a:r>
+            <a:r>
+              <a:rPr sz="1950" b="0">
+                <a:solidFill>
+                  <a:srgbClr val="29263B"/>
+                </a:solidFill>
+                <a:latin typeface="Microsoft YaHei"/>
+                <a:ea typeface="Microsoft YaHei"/>
+                <a:cs typeface="Microsoft YaHei"/>
+              </a:rPr>
+              <a:t>：只给使用者。</a:t>
             </a:r>
           </a:p>
           <a:p>
@@ -28255,13 +28707,24 @@
             <a:r>
               <a:rPr sz="1725">
                 <a:solidFill>
-                  <a:srgbClr val="29263B"/>
-                </a:solidFill>
-                <a:latin typeface="Microsoft YaHei"/>
-                <a:ea typeface="Microsoft YaHei"/>
-                <a:cs typeface="Microsoft YaHei"/>
-              </a:rPr>
-              <a:t>PUBLIC include/</a:t>
+                  <a:srgbClr val="B84E00"/>
+                </a:solidFill>
+                <a:latin typeface="Microsoft YaHei"/>
+                <a:ea typeface="Microsoft YaHei"/>
+                <a:cs typeface="Microsoft YaHei"/>
+              </a:rPr>
+              <a:t>PUBLIC</a:t>
+            </a:r>
+            <a:r>
+              <a:rPr sz="1725">
+                <a:solidFill>
+                  <a:srgbClr val="29263B"/>
+                </a:solidFill>
+                <a:latin typeface="Microsoft YaHei"/>
+                <a:ea typeface="Microsoft YaHei"/>
+                <a:cs typeface="Microsoft YaHei"/>
+              </a:rPr>
+              <a:t> include/</a:t>
             </a:r>
           </a:p>
         </p:txBody>
@@ -28480,7 +28943,16 @@
               <a:rPr u="sng">
                 <a:hlinkClick r:id="rId3"/>
               </a:rPr>
-              <a:t>依据：CMake 帮助：manual/cmake-buildsystem.7.rst</a:t>
+              <a:t>依据：CMake 帮助：manual/cmake-</a:t>
+            </a:r>
+            <a:r>
+              <a:rPr u="sng">
+                <a:solidFill>
+                  <a:srgbClr val="0070C0"/>
+                </a:solidFill>
+                <a:hlinkClick r:id="rId3"/>
+              </a:rPr>
+              <a:t>buildsystem.7.rst</a:t>
             </a:r>
           </a:p>
         </p:txBody>
@@ -28889,7 +29361,73 @@
                 <a:ea typeface="Microsoft YaHei"/>
                 <a:cs typeface="Microsoft YaHei"/>
               </a:rPr>
-              <a:t>改入口后重新配置同一 out，再 cmake --build，运行 my_app.exe。</a:t>
+              <a:t>改入口后重新配置同一 out，再 </a:t>
+            </a:r>
+            <a:r>
+              <a:rPr sz="1950" b="0">
+                <a:solidFill>
+                  <a:srgbClr val="A02B93"/>
+                </a:solidFill>
+                <a:latin typeface="Microsoft YaHei"/>
+                <a:ea typeface="Microsoft YaHei"/>
+                <a:cs typeface="Microsoft YaHei"/>
+              </a:rPr>
+              <a:t>cmake</a:t>
+            </a:r>
+            <a:r>
+              <a:rPr sz="1950" b="0">
+                <a:solidFill>
+                  <a:srgbClr val="29263B"/>
+                </a:solidFill>
+                <a:latin typeface="Microsoft YaHei"/>
+                <a:ea typeface="Microsoft YaHei"/>
+                <a:cs typeface="Microsoft YaHei"/>
+              </a:rPr>
+              <a:t> </a:t>
+            </a:r>
+            <a:r>
+              <a:rPr sz="1950" b="0">
+                <a:solidFill>
+                  <a:srgbClr val="B84E00"/>
+                </a:solidFill>
+                <a:latin typeface="Microsoft YaHei"/>
+                <a:ea typeface="Microsoft YaHei"/>
+                <a:cs typeface="Microsoft YaHei"/>
+              </a:rPr>
+              <a:t>--build</a:t>
+            </a:r>
+            <a:r>
+              <a:rPr sz="1950" b="0">
+                <a:solidFill>
+                  <a:srgbClr val="29263B"/>
+                </a:solidFill>
+                <a:latin typeface="Microsoft YaHei"/>
+                <a:ea typeface="Microsoft YaHei"/>
+                <a:cs typeface="Microsoft YaHei"/>
+              </a:rPr>
+              <a:t>，运行 </a:t>
+            </a:r>
+            <a:r>
+              <a:rPr sz="1950" b="0">
+                <a:solidFill>
+                  <a:srgbClr val="0070C0"/>
+                </a:solidFill>
+                <a:latin typeface="Microsoft YaHei"/>
+                <a:ea typeface="Microsoft YaHei"/>
+                <a:cs typeface="Microsoft YaHei"/>
+              </a:rPr>
+              <a:t>my_app.exe</a:t>
+            </a:r>
+            <a:r>
+              <a:rPr sz="1950" b="0">
+                <a:solidFill>
+                  <a:srgbClr val="29263B"/>
+                </a:solidFill>
+                <a:latin typeface="Microsoft YaHei"/>
+                <a:ea typeface="Microsoft YaHei"/>
+                <a:cs typeface="Microsoft YaHei"/>
+              </a:rPr>
+              <a:t>。</a:t>
             </a:r>
           </a:p>
           <a:p>
@@ -29049,7 +29587,16 @@
               <a:rPr u="sng">
                 <a:hlinkClick r:id="rId3"/>
               </a:rPr>
-              <a:t>依据：CMake 帮助：manual/cmake-buildsystem.7.rst</a:t>
+              <a:t>依据：CMake 帮助：manual/cmake-</a:t>
+            </a:r>
+            <a:r>
+              <a:rPr u="sng">
+                <a:solidFill>
+                  <a:srgbClr val="0070C0"/>
+                </a:solidFill>
+                <a:hlinkClick r:id="rId3"/>
+              </a:rPr>
+              <a:t>buildsystem.7.rst</a:t>
             </a:r>
           </a:p>
         </p:txBody>
@@ -29458,7 +30005,51 @@
                 <a:ea typeface="Microsoft YaHei"/>
                 <a:cs typeface="Microsoft YaHei"/>
               </a:rPr>
-              <a:t>根入口处理到 add_subdirectory(lib)，就进入 lib/CMakeLists.txt。</a:t>
+              <a:t>根入口处理到 </a:t>
+            </a:r>
+            <a:r>
+              <a:rPr sz="1950" b="0">
+                <a:solidFill>
+                  <a:srgbClr val="087B3D"/>
+                </a:solidFill>
+                <a:latin typeface="Microsoft YaHei"/>
+                <a:ea typeface="Microsoft YaHei"/>
+                <a:cs typeface="Microsoft YaHei"/>
+              </a:rPr>
+              <a:t>add_subdirectory</a:t>
+            </a:r>
+            <a:r>
+              <a:rPr sz="1950" b="0">
+                <a:solidFill>
+                  <a:srgbClr val="29263B"/>
+                </a:solidFill>
+                <a:latin typeface="Microsoft YaHei"/>
+                <a:ea typeface="Microsoft YaHei"/>
+                <a:cs typeface="Microsoft YaHei"/>
+              </a:rPr>
+              <a:t>(lib)，就进入 </a:t>
+            </a:r>
+            <a:r>
+              <a:rPr sz="1950" b="0">
+                <a:solidFill>
+                  <a:srgbClr val="0070C0"/>
+                </a:solidFill>
+                <a:latin typeface="Microsoft YaHei"/>
+                <a:ea typeface="Microsoft YaHei"/>
+                <a:cs typeface="Microsoft YaHei"/>
+              </a:rPr>
+              <a:t>lib/CMakeLists.txt</a:t>
+            </a:r>
+            <a:r>
+              <a:rPr sz="1950" b="0">
+                <a:solidFill>
+                  <a:srgbClr val="29263B"/>
+                </a:solidFill>
+                <a:latin typeface="Microsoft YaHei"/>
+                <a:ea typeface="Microsoft YaHei"/>
+                <a:cs typeface="Microsoft YaHei"/>
+              </a:rPr>
+              <a:t>。</a:t>
             </a:r>
           </a:p>
           <a:p>
@@ -29518,7 +30109,29 @@
                 <a:ea typeface="Microsoft YaHei"/>
                 <a:cs typeface="Microsoft YaHei"/>
               </a:rPr>
-              <a:t>子目录中 CMAKE_CURRENT_SOURCE_DIR 指向 lib。</a:t>
+              <a:t>子目录中 </a:t>
+            </a:r>
+            <a:r>
+              <a:rPr sz="1950" b="0">
+                <a:solidFill>
+                  <a:srgbClr val="B84E00"/>
+                </a:solidFill>
+                <a:latin typeface="Microsoft YaHei"/>
+                <a:ea typeface="Microsoft YaHei"/>
+                <a:cs typeface="Microsoft YaHei"/>
+              </a:rPr>
+              <a:t>CMAKE_CURRENT_SOURCE_DIR</a:t>
+            </a:r>
+            <a:r>
+              <a:rPr sz="1950" b="0">
+                <a:solidFill>
+                  <a:srgbClr val="29263B"/>
+                </a:solidFill>
+                <a:latin typeface="Microsoft YaHei"/>
+                <a:ea typeface="Microsoft YaHei"/>
+                <a:cs typeface="Microsoft YaHei"/>
+              </a:rPr>
+              <a:t> 指向 lib。</a:t>
             </a:r>
           </a:p>
         </p:txBody>
@@ -29735,7 +30348,7 @@
             <a:r>
               <a:rPr sz="1725">
                 <a:solidFill>
-                  <a:srgbClr val="29263B"/>
+                  <a:srgbClr val="0070C0"/>
                 </a:solidFill>
                 <a:latin typeface="Microsoft YaHei"/>
                 <a:ea typeface="Microsoft YaHei"/>
@@ -30109,7 +30722,16 @@
               <a:rPr u="sng">
                 <a:hlinkClick r:id="rId3"/>
               </a:rPr>
-              <a:t>依据：CMake 帮助：manual/cmake-buildsystem.7.rst</a:t>
+              <a:t>依据：CMake 帮助：manual/cmake-</a:t>
+            </a:r>
+            <a:r>
+              <a:rPr u="sng">
+                <a:solidFill>
+                  <a:srgbClr val="0070C0"/>
+                </a:solidFill>
+                <a:hlinkClick r:id="rId3"/>
+              </a:rPr>
+              <a:t>buildsystem.7.rst</a:t>
             </a:r>
           </a:p>
         </p:txBody>
@@ -30518,7 +31140,29 @@
                 <a:ea typeface="Microsoft YaHei"/>
                 <a:cs typeface="Microsoft YaHei"/>
               </a:rPr>
-              <a:t>Config 模式寻找 NameConfig.cmake 等入口。</a:t>
+              <a:t>Config 模式寻找 </a:t>
+            </a:r>
+            <a:r>
+              <a:rPr sz="1950" b="0">
+                <a:solidFill>
+                  <a:srgbClr val="0070C0"/>
+                </a:solidFill>
+                <a:latin typeface="Microsoft YaHei"/>
+                <a:ea typeface="Microsoft YaHei"/>
+                <a:cs typeface="Microsoft YaHei"/>
+              </a:rPr>
+              <a:t>NameConfig.cmake</a:t>
+            </a:r>
+            <a:r>
+              <a:rPr sz="1950" b="0">
+                <a:solidFill>
+                  <a:srgbClr val="29263B"/>
+                </a:solidFill>
+                <a:latin typeface="Microsoft YaHei"/>
+                <a:ea typeface="Microsoft YaHei"/>
+                <a:cs typeface="Microsoft YaHei"/>
+              </a:rPr>
+              <a:t> 等入口。</a:t>
             </a:r>
           </a:p>
           <a:p>
@@ -30548,7 +31192,29 @@
                 <a:ea typeface="Microsoft YaHei"/>
                 <a:cs typeface="Microsoft YaHei"/>
               </a:rPr>
-              <a:t>Module 模式寻找 FindName.cmake。</a:t>
+              <a:t>Module 模式寻找 </a:t>
+            </a:r>
+            <a:r>
+              <a:rPr sz="1950" b="0">
+                <a:solidFill>
+                  <a:srgbClr val="0070C0"/>
+                </a:solidFill>
+                <a:latin typeface="Microsoft YaHei"/>
+                <a:ea typeface="Microsoft YaHei"/>
+                <a:cs typeface="Microsoft YaHei"/>
+              </a:rPr>
+              <a:t>FindName.cmake</a:t>
+            </a:r>
+            <a:r>
+              <a:rPr sz="1950" b="0">
+                <a:solidFill>
+                  <a:srgbClr val="29263B"/>
+                </a:solidFill>
+                <a:latin typeface="Microsoft YaHei"/>
+                <a:ea typeface="Microsoft YaHei"/>
+                <a:cs typeface="Microsoft YaHei"/>
+              </a:rPr>
+              <a:t>。</a:t>
             </a:r>
           </a:p>
           <a:p>
@@ -30795,7 +31461,7 @@
             <a:r>
               <a:rPr sz="1725">
                 <a:solidFill>
-                  <a:srgbClr val="29263B"/>
+                  <a:srgbClr val="087B3D"/>
                 </a:solidFill>
                 <a:latin typeface="Microsoft YaHei"/>
                 <a:ea typeface="Microsoft YaHei"/>
@@ -31169,7 +31835,16 @@
               <a:rPr u="sng">
                 <a:hlinkClick r:id="rId3"/>
               </a:rPr>
-              <a:t>依据：CMake 帮助：manual/cmake-buildsystem.7.rst</a:t>
+              <a:t>依据：CMake 帮助：manual/cmake-</a:t>
+            </a:r>
+            <a:r>
+              <a:rPr u="sng">
+                <a:solidFill>
+                  <a:srgbClr val="0070C0"/>
+                </a:solidFill>
+                <a:hlinkClick r:id="rId3"/>
+              </a:rPr>
+              <a:t>buildsystem.7.rst</a:t>
             </a:r>
           </a:p>
         </p:txBody>
@@ -31762,7 +32437,16 @@
               <a:rPr u="sng">
                 <a:hlinkClick r:id="rId3"/>
               </a:rPr>
-              <a:t>依据：CMake 帮助：manual/cmake-buildsystem.7.rst</a:t>
+              <a:t>依据：CMake 帮助：manual/cmake-</a:t>
+            </a:r>
+            <a:r>
+              <a:rPr u="sng">
+                <a:solidFill>
+                  <a:srgbClr val="0070C0"/>
+                </a:solidFill>
+                <a:hlinkClick r:id="rId3"/>
+              </a:rPr>
+              <a:t>buildsystem.7.rst</a:t>
             </a:r>
           </a:p>
         </p:txBody>
@@ -32201,7 +32885,29 @@
                 <a:ea typeface="Microsoft YaHei"/>
                 <a:cs typeface="Microsoft YaHei"/>
               </a:rPr>
-              <a:t>本册产物：Windows 主机上的 my_app.exe。</a:t>
+              <a:t>本册产物：Windows 主机上的 </a:t>
+            </a:r>
+            <a:r>
+              <a:rPr sz="1950" b="0">
+                <a:solidFill>
+                  <a:srgbClr val="0070C0"/>
+                </a:solidFill>
+                <a:latin typeface="Microsoft YaHei"/>
+                <a:ea typeface="Microsoft YaHei"/>
+                <a:cs typeface="Microsoft YaHei"/>
+              </a:rPr>
+              <a:t>my_app.exe</a:t>
+            </a:r>
+            <a:r>
+              <a:rPr sz="1950" b="0">
+                <a:solidFill>
+                  <a:srgbClr val="29263B"/>
+                </a:solidFill>
+                <a:latin typeface="Microsoft YaHei"/>
+                <a:ea typeface="Microsoft YaHei"/>
+                <a:cs typeface="Microsoft YaHei"/>
+              </a:rPr>
+              <a:t>。</a:t>
             </a:r>
           </a:p>
           <a:p>
@@ -32231,7 +32937,29 @@
                 <a:ea typeface="Microsoft YaHei"/>
                 <a:cs typeface="Microsoft YaHei"/>
               </a:rPr>
-              <a:t>P007 再引入 Zephyr 与目标板；west 单独在 P008。</a:t>
+              <a:t>P007 再引入 Zephyr 与目标板；</a:t>
+            </a:r>
+            <a:r>
+              <a:rPr sz="1950" b="0">
+                <a:solidFill>
+                  <a:srgbClr val="A02B93"/>
+                </a:solidFill>
+                <a:latin typeface="Microsoft YaHei"/>
+                <a:ea typeface="Microsoft YaHei"/>
+                <a:cs typeface="Microsoft YaHei"/>
+              </a:rPr>
+              <a:t>west</a:t>
+            </a:r>
+            <a:r>
+              <a:rPr sz="1950" b="0">
+                <a:solidFill>
+                  <a:srgbClr val="29263B"/>
+                </a:solidFill>
+                <a:latin typeface="Microsoft YaHei"/>
+                <a:ea typeface="Microsoft YaHei"/>
+                <a:cs typeface="Microsoft YaHei"/>
+              </a:rPr>
+              <a:t> 单独在 P008。</a:t>
             </a:r>
           </a:p>
         </p:txBody>
@@ -32822,7 +33550,16 @@
               <a:rPr u="sng">
                 <a:hlinkClick r:id="rId3"/>
               </a:rPr>
-              <a:t>依据：CMake 帮助：manual/cmake-buildsystem.7.rst</a:t>
+              <a:t>依据：CMake 帮助：manual/cmake-</a:t>
+            </a:r>
+            <a:r>
+              <a:rPr u="sng">
+                <a:solidFill>
+                  <a:srgbClr val="0070C0"/>
+                </a:solidFill>
+                <a:hlinkClick r:id="rId3"/>
+              </a:rPr>
+              <a:t>buildsystem.7.rst</a:t>
             </a:r>
           </a:p>
         </p:txBody>
@@ -32970,6 +33707,107 @@
               <a:ea typeface="Microsoft YaHei"/>
               <a:cs typeface="Microsoft YaHei"/>
             </a:endParaRPr>
+          </a:p>
+        </p:txBody>
+      </p:sp>
+      <p:sp>
+        <p:nvSpPr>
+          <p:cNvPr id="15" name="Semantic color legend">
+            <a:extLst>
+              <a:ext uri="{FF2B5EF4-FFF2-40B4-BE49-F238E27FC236}">
+                <a16:creationId xmlns:a16="http://schemas.microsoft.com/office/drawing/2014/main" id="{39154CEE-9E0E-4815-8A42-342F49989EDD}"/>
+              </a:ext>
+            </a:extLst>
+          </p:cNvPr>
+          <p:cNvSpPr>
+            <a:spLocks noGrp="1"/>
+          </p:cNvSpPr>
+          <p:nvPr/>
+        </p:nvSpPr>
+        <p:spPr>
+          <a:xfrm>
+            <a:off x="609600" y="5314950"/>
+            <a:ext cx="10972800" cy="342900"/>
+          </a:xfrm>
+          <a:prstGeom prst="rect">
+            <a:avLst/>
+          </a:prstGeom>
+          <a:noFill/>
+          <a:ln w="0">
+            <a:noFill/>
+          </a:ln>
+        </p:spPr>
+        <p:txBody>
+          <a:bodyPr>
+            <a:noAutofit/>
+          </a:bodyPr>
+          <a:lstStyle>
+            <a:defPPr>
+              <a:defRPr sz="1575">
+                <a:solidFill>
+                  <a:srgbClr val="646173"/>
+                </a:solidFill>
+                <a:latin typeface="Microsoft YaHei"/>
+                <a:ea typeface="Microsoft YaHei"/>
+                <a:cs typeface="Microsoft YaHei"/>
+              </a:defRPr>
+            </a:defPPr>
+          </a:lstStyle>
+          <a:p>
+            <a:pPr>
+              <a:defRPr sz="1575">
+                <a:solidFill>
+                  <a:srgbClr val="646173"/>
+                </a:solidFill>
+                <a:latin typeface="Microsoft YaHei"/>
+                <a:ea typeface="Microsoft YaHei"/>
+                <a:cs typeface="Microsoft YaHei"/>
+              </a:defRPr>
+            </a:pPr>
+            <a:r>
+              <a:t>阅读标色： </a:t>
+            </a:r>
+            <a:r>
+              <a:rPr>
+                <a:solidFill>
+                  <a:srgbClr val="B84E00"/>
+                </a:solidFill>
+              </a:rPr>
+              <a:t>变量 / 参数</a:t>
+            </a:r>
+            <a:r>
+              <a:t>     </a:t>
+            </a:r>
+            <a:r>
+              <a:rPr>
+                <a:solidFill>
+                  <a:srgbClr val="0070C0"/>
+                </a:solidFill>
+              </a:rPr>
+              <a:t>文件 / 路径</a:t>
+            </a:r>
+            <a:r>
+              <a:t>     </a:t>
+            </a:r>
+            <a:r>
+              <a:rPr>
+                <a:solidFill>
+                  <a:srgbClr val="087B3D"/>
+                </a:solidFill>
+              </a:rPr>
+              <a:t>接口函数</a:t>
+            </a:r>
+            <a:r>
+              <a:t>     </a:t>
+            </a:r>
+            <a:r>
+              <a:rPr>
+                <a:solidFill>
+                  <a:srgbClr val="A02B93"/>
+                </a:solidFill>
+              </a:rPr>
+              <a:t>终端命令</a:t>
+            </a:r>
           </a:p>
         </p:txBody>
       </p:sp>
@@ -33315,13 +34153,24 @@
             <a:r>
               <a:rPr sz="1950" b="0">
                 <a:solidFill>
-                  <a:srgbClr val="29263B"/>
-                </a:solidFill>
-                <a:latin typeface="Microsoft YaHei"/>
-                <a:ea typeface="Microsoft YaHei"/>
-                <a:cs typeface="Microsoft YaHei"/>
-              </a:rPr>
-              <a:t>-D 传了一个名字，不等于编译器自动收到同名宏。</a:t>
+                  <a:srgbClr val="B84E00"/>
+                </a:solidFill>
+                <a:latin typeface="Microsoft YaHei"/>
+                <a:ea typeface="Microsoft YaHei"/>
+                <a:cs typeface="Microsoft YaHei"/>
+              </a:rPr>
+              <a:t>-D</a:t>
+            </a:r>
+            <a:r>
+              <a:rPr sz="1950" b="0">
+                <a:solidFill>
+                  <a:srgbClr val="29263B"/>
+                </a:solidFill>
+                <a:latin typeface="Microsoft YaHei"/>
+                <a:ea typeface="Microsoft YaHei"/>
+                <a:cs typeface="Microsoft YaHei"/>
+              </a:rPr>
+              <a:t> 传了一个名字，不等于编译器自动收到同名宏。</a:t>
             </a:r>
           </a:p>
         </p:txBody>
@@ -33391,7 +34240,16 @@
               <a:rPr u="sng">
                 <a:hlinkClick r:id="rId3"/>
               </a:rPr>
-              <a:t>依据：CMake 帮助：manual/cmake-buildsystem.7.rst</a:t>
+              <a:t>依据：CMake 帮助：manual/cmake-</a:t>
+            </a:r>
+            <a:r>
+              <a:rPr u="sng">
+                <a:solidFill>
+                  <a:srgbClr val="0070C0"/>
+                </a:solidFill>
+                <a:hlinkClick r:id="rId3"/>
+              </a:rPr>
+              <a:t>buildsystem.7.rst</a:t>
             </a:r>
           </a:p>
         </p:txBody>
@@ -34108,13 +34966,46 @@
             <a:r>
               <a:rPr sz="1800" b="0">
                 <a:solidFill>
-                  <a:srgbClr val="29263B"/>
-                </a:solidFill>
-                <a:latin typeface="Microsoft YaHei"/>
-                <a:ea typeface="Microsoft YaHei"/>
-                <a:cs typeface="Microsoft YaHei"/>
-              </a:rPr>
-              <a:t>option 声明缓存项；if 读取；target 接口才把宏加入编译规则。</a:t>
+                  <a:srgbClr val="087B3D"/>
+                </a:solidFill>
+                <a:latin typeface="Microsoft YaHei"/>
+                <a:ea typeface="Microsoft YaHei"/>
+                <a:cs typeface="Microsoft YaHei"/>
+              </a:rPr>
+              <a:t>option</a:t>
+            </a:r>
+            <a:r>
+              <a:rPr sz="1800" b="0">
+                <a:solidFill>
+                  <a:srgbClr val="29263B"/>
+                </a:solidFill>
+                <a:latin typeface="Microsoft YaHei"/>
+                <a:ea typeface="Microsoft YaHei"/>
+                <a:cs typeface="Microsoft YaHei"/>
+              </a:rPr>
+              <a:t> 声明缓存项；</a:t>
+            </a:r>
+            <a:r>
+              <a:rPr sz="1800" b="0">
+                <a:solidFill>
+                  <a:srgbClr val="087B3D"/>
+                </a:solidFill>
+                <a:latin typeface="Microsoft YaHei"/>
+                <a:ea typeface="Microsoft YaHei"/>
+                <a:cs typeface="Microsoft YaHei"/>
+              </a:rPr>
+              <a:t>if</a:t>
+            </a:r>
+            <a:r>
+              <a:rPr sz="1800" b="0">
+                <a:solidFill>
+                  <a:srgbClr val="29263B"/>
+                </a:solidFill>
+                <a:latin typeface="Microsoft YaHei"/>
+                <a:ea typeface="Microsoft YaHei"/>
+                <a:cs typeface="Microsoft YaHei"/>
+              </a:rPr>
+              <a:t> 读取；target 接口才把宏加入编译规则。</a:t>
             </a:r>
           </a:p>
         </p:txBody>
@@ -34184,7 +35075,16 @@
               <a:rPr u="sng">
                 <a:hlinkClick r:id="rId3"/>
               </a:rPr>
-              <a:t>依据：CMake 帮助：manual/cmake-buildsystem.7.rst</a:t>
+              <a:t>依据：CMake 帮助：manual/cmake-</a:t>
+            </a:r>
+            <a:r>
+              <a:rPr u="sng">
+                <a:solidFill>
+                  <a:srgbClr val="0070C0"/>
+                </a:solidFill>
+                <a:hlinkClick r:id="rId3"/>
+              </a:rPr>
+              <a:t>buildsystem.7.rst</a:t>
             </a:r>
           </a:p>
         </p:txBody>
@@ -34593,7 +35493,29 @@
                 <a:ea typeface="Microsoft YaHei"/>
                 <a:cs typeface="Microsoft YaHei"/>
               </a:rPr>
-              <a:t>普通程序：自己 add_executable，然后添加源码与属性。</a:t>
+              <a:t>普通程序：自己 </a:t>
+            </a:r>
+            <a:r>
+              <a:rPr sz="1950" b="0">
+                <a:solidFill>
+                  <a:srgbClr val="087B3D"/>
+                </a:solidFill>
+                <a:latin typeface="Microsoft YaHei"/>
+                <a:ea typeface="Microsoft YaHei"/>
+                <a:cs typeface="Microsoft YaHei"/>
+              </a:rPr>
+              <a:t>add_executable</a:t>
+            </a:r>
+            <a:r>
+              <a:rPr sz="1950" b="0">
+                <a:solidFill>
+                  <a:srgbClr val="29263B"/>
+                </a:solidFill>
+                <a:latin typeface="Microsoft YaHei"/>
+                <a:ea typeface="Microsoft YaHei"/>
+                <a:cs typeface="Microsoft YaHei"/>
+              </a:rPr>
+              <a:t>，然后添加源码与属性。</a:t>
             </a:r>
           </a:p>
           <a:p>
@@ -34623,7 +35545,51 @@
                 <a:ea typeface="Microsoft YaHei"/>
                 <a:cs typeface="Microsoft YaHei"/>
               </a:rPr>
-              <a:t>Zephyr 应用：先 find_package，随后直接 target_sources(app)。</a:t>
+              <a:t>Zephyr 应用：先 </a:t>
+            </a:r>
+            <a:r>
+              <a:rPr sz="1950" b="0">
+                <a:solidFill>
+                  <a:srgbClr val="087B3D"/>
+                </a:solidFill>
+                <a:latin typeface="Microsoft YaHei"/>
+                <a:ea typeface="Microsoft YaHei"/>
+                <a:cs typeface="Microsoft YaHei"/>
+              </a:rPr>
+              <a:t>find_package</a:t>
+            </a:r>
+            <a:r>
+              <a:rPr sz="1950" b="0">
+                <a:solidFill>
+                  <a:srgbClr val="29263B"/>
+                </a:solidFill>
+                <a:latin typeface="Microsoft YaHei"/>
+                <a:ea typeface="Microsoft YaHei"/>
+                <a:cs typeface="Microsoft YaHei"/>
+              </a:rPr>
+              <a:t>，随后直接 </a:t>
+            </a:r>
+            <a:r>
+              <a:rPr sz="1950" b="0">
+                <a:solidFill>
+                  <a:srgbClr val="087B3D"/>
+                </a:solidFill>
+                <a:latin typeface="Microsoft YaHei"/>
+                <a:ea typeface="Microsoft YaHei"/>
+                <a:cs typeface="Microsoft YaHei"/>
+              </a:rPr>
+              <a:t>target_sources</a:t>
+            </a:r>
+            <a:r>
+              <a:rPr sz="1950" b="0">
+                <a:solidFill>
+                  <a:srgbClr val="29263B"/>
+                </a:solidFill>
+                <a:latin typeface="Microsoft YaHei"/>
+                <a:ea typeface="Microsoft YaHei"/>
+                <a:cs typeface="Microsoft YaHei"/>
+              </a:rPr>
+              <a:t>(app)。</a:t>
             </a:r>
           </a:p>
           <a:p>
@@ -34683,7 +35649,29 @@
                 <a:ea typeface="Microsoft YaHei"/>
                 <a:cs typeface="Microsoft YaHei"/>
               </a:rPr>
-              <a:t>缓存深入 P010；west 入门与调用关系单独在 P008。</a:t>
+              <a:t>缓存深入 P010；</a:t>
+            </a:r>
+            <a:r>
+              <a:rPr sz="1950" b="0">
+                <a:solidFill>
+                  <a:srgbClr val="A02B93"/>
+                </a:solidFill>
+                <a:latin typeface="Microsoft YaHei"/>
+                <a:ea typeface="Microsoft YaHei"/>
+                <a:cs typeface="Microsoft YaHei"/>
+              </a:rPr>
+              <a:t>west</a:t>
+            </a:r>
+            <a:r>
+              <a:rPr sz="1950" b="0">
+                <a:solidFill>
+                  <a:srgbClr val="29263B"/>
+                </a:solidFill>
+                <a:latin typeface="Microsoft YaHei"/>
+                <a:ea typeface="Microsoft YaHei"/>
+                <a:cs typeface="Microsoft YaHei"/>
+              </a:rPr>
+              <a:t> 入门与调用关系单独在 P008。</a:t>
             </a:r>
           </a:p>
         </p:txBody>
@@ -34753,7 +35741,16 @@
               <a:rPr u="sng">
                 <a:hlinkClick r:id="rId3"/>
               </a:rPr>
-              <a:t>依据：CMake 帮助：manual/cmake-buildsystem.7.rst</a:t>
+              <a:t>依据：CMake 帮助：manual/cmake-</a:t>
+            </a:r>
+            <a:r>
+              <a:rPr u="sng">
+                <a:solidFill>
+                  <a:srgbClr val="0070C0"/>
+                </a:solidFill>
+                <a:hlinkClick r:id="rId3"/>
+              </a:rPr>
+              <a:t>buildsystem.7.rst</a:t>
             </a:r>
           </a:p>
         </p:txBody>
@@ -35273,7 +36270,23 @@
                   <a:srgbClr val="A02B93"/>
                 </a:solidFill>
               </a:rPr>
-              <a:t>cmake --build</a:t>
+              <a:t>cmake</a:t>
+            </a:r>
+            <a:r>
+              <a:rPr>
+                <a:solidFill>
+                  <a:srgbClr val="A02B93"/>
+                </a:solidFill>
+              </a:rPr>
+              <a:t> </a:t>
+            </a:r>
+            <a:r>
+              <a:rPr>
+                <a:solidFill>
+                  <a:srgbClr val="B84E00"/>
+                </a:solidFill>
+              </a:rPr>
+              <a:t>--build</a:t>
             </a:r>
             <a:r>
               <a:rPr sz="1950" b="0">
@@ -35726,7 +36739,16 @@
               <a:rPr u="sng">
                 <a:hlinkClick r:id="rId3"/>
               </a:rPr>
-              <a:t>依据：CMake 帮助：manual/cmake-buildsystem.7.rst</a:t>
+              <a:t>依据：CMake 帮助：manual/cmake-</a:t>
+            </a:r>
+            <a:r>
+              <a:rPr u="sng">
+                <a:solidFill>
+                  <a:srgbClr val="0070C0"/>
+                </a:solidFill>
+                <a:hlinkClick r:id="rId3"/>
+              </a:rPr>
+              <a:t>buildsystem.7.rst</a:t>
             </a:r>
           </a:p>
         </p:txBody>
@@ -36263,7 +37285,7 @@
             <a:r>
               <a:rPr sz="1725">
                 <a:solidFill>
-                  <a:srgbClr val="29263B"/>
+                  <a:srgbClr val="0070C0"/>
                 </a:solidFill>
                 <a:latin typeface="Microsoft YaHei"/>
                 <a:ea typeface="Microsoft YaHei"/>
@@ -36561,7 +37583,7 @@
             <a:r>
               <a:rPr sz="1725">
                 <a:solidFill>
-                  <a:srgbClr val="29263B"/>
+                  <a:srgbClr val="0070C0"/>
                 </a:solidFill>
                 <a:latin typeface="Microsoft YaHei"/>
                 <a:ea typeface="Microsoft YaHei"/>
@@ -36710,7 +37732,7 @@
             <a:r>
               <a:rPr sz="1725">
                 <a:solidFill>
-                  <a:srgbClr val="29263B"/>
+                  <a:srgbClr val="0070C0"/>
                 </a:solidFill>
                 <a:latin typeface="Microsoft YaHei"/>
                 <a:ea typeface="Microsoft YaHei"/>
@@ -36786,7 +37808,16 @@
               <a:rPr u="sng">
                 <a:hlinkClick r:id="rId3"/>
               </a:rPr>
-              <a:t>依据：CMake 帮助：manual/cmake-buildsystem.7.rst</a:t>
+              <a:t>依据：CMake 帮助：manual/cmake-</a:t>
+            </a:r>
+            <a:r>
+              <a:rPr u="sng">
+                <a:solidFill>
+                  <a:srgbClr val="0070C0"/>
+                </a:solidFill>
+                <a:hlinkClick r:id="rId3"/>
+              </a:rPr>
+              <a:t>buildsystem.7.rst</a:t>
             </a:r>
           </a:p>
         </p:txBody>
@@ -37273,13 +38304,35 @@
             <a:r>
               <a:rPr sz="1950" b="0" dirty="0" err="1">
                 <a:solidFill>
-                  <a:srgbClr val="29263B"/>
-                </a:solidFill>
-                <a:latin typeface="Microsoft YaHei"/>
-                <a:ea typeface="Microsoft YaHei"/>
-                <a:cs typeface="Microsoft YaHei"/>
-              </a:rPr>
-              <a:t>CMakeLists.txt、main.c</a:t>
+                  <a:srgbClr val="0070C0"/>
+                </a:solidFill>
+                <a:latin typeface="Microsoft YaHei"/>
+                <a:ea typeface="Microsoft YaHei"/>
+                <a:cs typeface="Microsoft YaHei"/>
+              </a:rPr>
+              <a:t>CMakeLists.txt</a:t>
+            </a:r>
+            <a:r>
+              <a:rPr sz="1950" b="0" dirty="0" err="1">
+                <a:solidFill>
+                  <a:srgbClr val="29263B"/>
+                </a:solidFill>
+                <a:latin typeface="Microsoft YaHei"/>
+                <a:ea typeface="Microsoft YaHei"/>
+                <a:cs typeface="Microsoft YaHei"/>
+              </a:rPr>
+              <a:t>、</a:t>
+            </a:r>
+            <a:r>
+              <a:rPr sz="1950" b="0" dirty="0" err="1">
+                <a:solidFill>
+                  <a:srgbClr val="0070C0"/>
+                </a:solidFill>
+                <a:latin typeface="Microsoft YaHei"/>
+                <a:ea typeface="Microsoft YaHei"/>
+                <a:cs typeface="Microsoft YaHei"/>
+              </a:rPr>
+              <a:t>main.c</a:t>
             </a:r>
             <a:r>
               <a:rPr sz="1950" b="0" dirty="0">
@@ -37391,18 +38444,40 @@
                 <a:ea typeface="Microsoft YaHei"/>
                 <a:cs typeface="Microsoft YaHei"/>
               </a:rPr>
-              <a:t> samples/</a:t>
+              <a:t> </a:t>
+            </a:r>
+            <a:r>
+              <a:rPr sz="1950" b="0" dirty="0">
+                <a:solidFill>
+                  <a:srgbClr val="0070C0"/>
+                </a:solidFill>
+                <a:latin typeface="Microsoft YaHei"/>
+                <a:ea typeface="Microsoft YaHei"/>
+                <a:cs typeface="Microsoft YaHei"/>
+              </a:rPr>
+              <a:t>samples/</a:t>
             </a:r>
             <a:r>
               <a:rPr sz="1950" b="0" dirty="0" err="1">
                 <a:solidFill>
-                  <a:srgbClr val="29263B"/>
-                </a:solidFill>
-                <a:latin typeface="Microsoft YaHei"/>
-                <a:ea typeface="Microsoft YaHei"/>
-                <a:cs typeface="Microsoft YaHei"/>
-              </a:rPr>
-              <a:t>hello_world；这还不是</a:t>
+                  <a:srgbClr val="0070C0"/>
+                </a:solidFill>
+                <a:latin typeface="Microsoft YaHei"/>
+                <a:ea typeface="Microsoft YaHei"/>
+                <a:cs typeface="Microsoft YaHei"/>
+              </a:rPr>
+              <a:t>hello_world</a:t>
+            </a:r>
+            <a:r>
+              <a:rPr sz="1950" b="0" dirty="0" err="1">
+                <a:solidFill>
+                  <a:srgbClr val="29263B"/>
+                </a:solidFill>
+                <a:latin typeface="Microsoft YaHei"/>
+                <a:ea typeface="Microsoft YaHei"/>
+                <a:cs typeface="Microsoft YaHei"/>
+              </a:rPr>
+              <a:t>；这还不是</a:t>
             </a:r>
             <a:r>
               <a:rPr sz="1950" b="0" dirty="0">
@@ -37544,13 +38619,24 @@
             <a:r>
               <a:rPr sz="1725">
                 <a:solidFill>
-                  <a:srgbClr val="29263B"/>
-                </a:solidFill>
-                <a:latin typeface="Microsoft YaHei"/>
-                <a:ea typeface="Microsoft YaHei"/>
-                <a:cs typeface="Microsoft YaHei"/>
-              </a:rPr>
-              <a:t>source：自己写</a:t>
+                  <a:srgbClr val="0070C0"/>
+                </a:solidFill>
+                <a:latin typeface="Microsoft YaHei"/>
+                <a:ea typeface="Microsoft YaHei"/>
+                <a:cs typeface="Microsoft YaHei"/>
+              </a:rPr>
+              <a:t>source</a:t>
+            </a:r>
+            <a:r>
+              <a:rPr sz="1725">
+                <a:solidFill>
+                  <a:srgbClr val="29263B"/>
+                </a:solidFill>
+                <a:latin typeface="Microsoft YaHei"/>
+                <a:ea typeface="Microsoft YaHei"/>
+                <a:cs typeface="Microsoft YaHei"/>
+              </a:rPr>
+              <a:t>：自己写</a:t>
             </a:r>
           </a:p>
         </p:txBody>
@@ -37693,13 +38779,24 @@
             <a:r>
               <a:rPr sz="1725">
                 <a:solidFill>
-                  <a:srgbClr val="29263B"/>
-                </a:solidFill>
-                <a:latin typeface="Microsoft YaHei"/>
-                <a:ea typeface="Microsoft YaHei"/>
-                <a:cs typeface="Microsoft YaHei"/>
-              </a:rPr>
-              <a:t>-S 选择入口</a:t>
+                  <a:srgbClr val="B84E00"/>
+                </a:solidFill>
+                <a:latin typeface="Microsoft YaHei"/>
+                <a:ea typeface="Microsoft YaHei"/>
+                <a:cs typeface="Microsoft YaHei"/>
+              </a:rPr>
+              <a:t>-S</a:t>
+            </a:r>
+            <a:r>
+              <a:rPr sz="1725">
+                <a:solidFill>
+                  <a:srgbClr val="29263B"/>
+                </a:solidFill>
+                <a:latin typeface="Microsoft YaHei"/>
+                <a:ea typeface="Microsoft YaHei"/>
+                <a:cs typeface="Microsoft YaHei"/>
+              </a:rPr>
+              <a:t> 选择入口</a:t>
             </a:r>
           </a:p>
         </p:txBody>
@@ -37842,13 +38939,24 @@
             <a:r>
               <a:rPr sz="1725">
                 <a:solidFill>
-                  <a:srgbClr val="29263B"/>
-                </a:solidFill>
-                <a:latin typeface="Microsoft YaHei"/>
-                <a:ea typeface="Microsoft YaHei"/>
-                <a:cs typeface="Microsoft YaHei"/>
-              </a:rPr>
-              <a:t>-B 选择 out</a:t>
+                  <a:srgbClr val="B84E00"/>
+                </a:solidFill>
+                <a:latin typeface="Microsoft YaHei"/>
+                <a:ea typeface="Microsoft YaHei"/>
+                <a:cs typeface="Microsoft YaHei"/>
+              </a:rPr>
+              <a:t>-B</a:t>
+            </a:r>
+            <a:r>
+              <a:rPr sz="1725">
+                <a:solidFill>
+                  <a:srgbClr val="29263B"/>
+                </a:solidFill>
+                <a:latin typeface="Microsoft YaHei"/>
+                <a:ea typeface="Microsoft YaHei"/>
+                <a:cs typeface="Microsoft YaHei"/>
+              </a:rPr>
+              <a:t> 选择 out</a:t>
             </a:r>
           </a:p>
         </p:txBody>
@@ -37991,13 +39099,24 @@
             <a:r>
               <a:rPr sz="1725">
                 <a:solidFill>
-                  <a:srgbClr val="29263B"/>
-                </a:solidFill>
-                <a:latin typeface="Microsoft YaHei"/>
-                <a:ea typeface="Microsoft YaHei"/>
-                <a:cs typeface="Microsoft YaHei"/>
-              </a:rPr>
-              <a:t>out：工具生成</a:t>
+                  <a:srgbClr val="0070C0"/>
+                </a:solidFill>
+                <a:latin typeface="Microsoft YaHei"/>
+                <a:ea typeface="Microsoft YaHei"/>
+                <a:cs typeface="Microsoft YaHei"/>
+              </a:rPr>
+              <a:t>out</a:t>
+            </a:r>
+            <a:r>
+              <a:rPr sz="1725">
+                <a:solidFill>
+                  <a:srgbClr val="29263B"/>
+                </a:solidFill>
+                <a:latin typeface="Microsoft YaHei"/>
+                <a:ea typeface="Microsoft YaHei"/>
+                <a:cs typeface="Microsoft YaHei"/>
+              </a:rPr>
+              <a:t>：工具生成</a:t>
             </a:r>
           </a:p>
         </p:txBody>
@@ -38067,7 +39186,16 @@
               <a:rPr u="sng">
                 <a:hlinkClick r:id="rId3"/>
               </a:rPr>
-              <a:t>依据：CMake 帮助：manual/cmake-buildsystem.7.rst</a:t>
+              <a:t>依据：CMake 帮助：manual/cmake-</a:t>
+            </a:r>
+            <a:r>
+              <a:rPr u="sng">
+                <a:solidFill>
+                  <a:srgbClr val="0070C0"/>
+                </a:solidFill>
+                <a:hlinkClick r:id="rId3"/>
+              </a:rPr>
+              <a:t>buildsystem.7.rst</a:t>
             </a:r>
           </a:p>
         </p:txBody>
@@ -38470,7 +39598,7 @@
             <a:r>
               <a:rPr sz="1725" b="0">
                 <a:solidFill>
-                  <a:srgbClr val="29263B"/>
+                  <a:srgbClr val="646173"/>
                 </a:solidFill>
                 <a:latin typeface="Consolas"/>
                 <a:ea typeface="Consolas"/>
@@ -38560,83 +39688,116 @@
                 <a:ea typeface="Consolas"/>
                 <a:cs typeface="Consolas"/>
               </a:rPr>
-              <a:t> --version</a:t>
-            </a:r>
-          </a:p>
-          <a:p>
-            <a:pPr>
-              <a:lnSpc>
-                <a:spcPct val="120000"/>
-              </a:lnSpc>
-              <a:spcAft>
-                <a:spcPts val="0"/>
-              </a:spcAft>
-              <a:buNone/>
-              <a:defRPr sz="1725" b="0">
-                <a:solidFill>
-                  <a:srgbClr val="29263B"/>
+              <a:t> </a:t>
+            </a:r>
+            <a:r>
+              <a:rPr sz="1725" b="0">
+                <a:solidFill>
+                  <a:srgbClr val="B84E00"/>
                 </a:solidFill>
                 <a:latin typeface="Consolas"/>
                 <a:ea typeface="Consolas"/>
                 <a:cs typeface="Consolas"/>
-              </a:defRPr>
-            </a:pPr>
-            <a:r>
-              <a:rPr>
-                <a:solidFill>
-                  <a:srgbClr val="A02B93"/>
-                </a:solidFill>
-              </a:rPr>
-              <a:t>ninja</a:t>
-            </a:r>
-            <a:r>
-              <a:rPr sz="1725" b="0">
+              </a:rPr>
+              <a:t>--version</a:t>
+            </a:r>
+          </a:p>
+          <a:p>
+            <a:pPr>
+              <a:lnSpc>
+                <a:spcPct val="120000"/>
+              </a:lnSpc>
+              <a:spcAft>
+                <a:spcPts val="0"/>
+              </a:spcAft>
+              <a:buNone/>
+              <a:defRPr sz="1725" b="0">
                 <a:solidFill>
                   <a:srgbClr val="29263B"/>
                 </a:solidFill>
                 <a:latin typeface="Consolas"/>
                 <a:ea typeface="Consolas"/>
                 <a:cs typeface="Consolas"/>
-              </a:rPr>
-              <a:t> --version</a:t>
-            </a:r>
-          </a:p>
-          <a:p>
-            <a:pPr>
-              <a:lnSpc>
-                <a:spcPct val="120000"/>
-              </a:lnSpc>
-              <a:spcAft>
-                <a:spcPts val="0"/>
-              </a:spcAft>
-              <a:buNone/>
-              <a:defRPr sz="1725" b="0">
+              </a:defRPr>
+            </a:pPr>
+            <a:r>
+              <a:rPr>
+                <a:solidFill>
+                  <a:srgbClr val="A02B93"/>
+                </a:solidFill>
+              </a:rPr>
+              <a:t>ninja</a:t>
+            </a:r>
+            <a:r>
+              <a:rPr sz="1725" b="0">
                 <a:solidFill>
                   <a:srgbClr val="29263B"/>
                 </a:solidFill>
                 <a:latin typeface="Consolas"/>
                 <a:ea typeface="Consolas"/>
                 <a:cs typeface="Consolas"/>
-              </a:defRPr>
-            </a:pPr>
-            <a:r>
-              <a:rPr>
-                <a:solidFill>
-                  <a:srgbClr val="A02B93"/>
-                </a:solidFill>
-              </a:rPr>
-              <a:t>gcc</a:t>
+              </a:rPr>
+              <a:t> </a:t>
             </a:r>
             <a:r>
               <a:rPr sz="1725" b="0">
                 <a:solidFill>
-                  <a:srgbClr val="29263B"/>
+                  <a:srgbClr val="B84E00"/>
                 </a:solidFill>
                 <a:latin typeface="Consolas"/>
                 <a:ea typeface="Consolas"/>
                 <a:cs typeface="Consolas"/>
               </a:rPr>
-              <a:t> -dumpmachine</a:t>
+              <a:t>--version</a:t>
+            </a:r>
+          </a:p>
+          <a:p>
+            <a:pPr>
+              <a:lnSpc>
+                <a:spcPct val="120000"/>
+              </a:lnSpc>
+              <a:spcAft>
+                <a:spcPts val="0"/>
+              </a:spcAft>
+              <a:buNone/>
+              <a:defRPr sz="1725" b="0">
+                <a:solidFill>
+                  <a:srgbClr val="29263B"/>
+                </a:solidFill>
+                <a:latin typeface="Consolas"/>
+                <a:ea typeface="Consolas"/>
+                <a:cs typeface="Consolas"/>
+              </a:defRPr>
+            </a:pPr>
+            <a:r>
+              <a:rPr>
+                <a:solidFill>
+                  <a:srgbClr val="29263B"/>
+                </a:solidFill>
+              </a:rPr>
+              <a:t>gcc</a:t>
+            </a:r>
+            <a:r>
+              <a:rPr sz="1725" b="0">
+                <a:solidFill>
+                  <a:srgbClr val="29263B"/>
+                </a:solidFill>
+                <a:latin typeface="Consolas"/>
+                <a:ea typeface="Consolas"/>
+                <a:cs typeface="Consolas"/>
+              </a:rPr>
+              <a:t> </a:t>
+            </a:r>
+            <a:r>
+              <a:rPr sz="1725" b="0">
+                <a:solidFill>
+                  <a:srgbClr val="B84E00"/>
+                </a:solidFill>
+                <a:latin typeface="Consolas"/>
+                <a:ea typeface="Consolas"/>
+                <a:cs typeface="Consolas"/>
+              </a:rPr>
+              <a:t>-dumpmachine</a:t>
             </a:r>
           </a:p>
         </p:txBody>
@@ -38741,7 +39902,29 @@
                 <a:ea typeface="Microsoft YaHei"/>
                 <a:cs typeface="Microsoft YaHei"/>
               </a:rPr>
-              <a:t>预期 gcc -dumpmachine 为 x86_64-w64-mingw32。</a:t>
+              <a:t>预期 gcc </a:t>
+            </a:r>
+            <a:r>
+              <a:rPr sz="1800" b="0">
+                <a:solidFill>
+                  <a:srgbClr val="B84E00"/>
+                </a:solidFill>
+                <a:latin typeface="Microsoft YaHei"/>
+                <a:ea typeface="Microsoft YaHei"/>
+                <a:cs typeface="Microsoft YaHei"/>
+              </a:rPr>
+              <a:t>-dumpmachine</a:t>
+            </a:r>
+            <a:r>
+              <a:rPr sz="1800" b="0">
+                <a:solidFill>
+                  <a:srgbClr val="29263B"/>
+                </a:solidFill>
+                <a:latin typeface="Microsoft YaHei"/>
+                <a:ea typeface="Microsoft YaHei"/>
+                <a:cs typeface="Microsoft YaHei"/>
+              </a:rPr>
+              <a:t> 为 x86_64-w64-mingw32。</a:t>
             </a:r>
           </a:p>
           <a:p>
@@ -38771,7 +39954,29 @@
                 <a:ea typeface="Microsoft YaHei"/>
                 <a:cs typeface="Microsoft YaHei"/>
               </a:rPr>
-              <a:t>缺少时按 MD 的可选 pacman 步骤安装；这不代替 ARM SDK。</a:t>
+              <a:t>缺少时按 MD 的可选 </a:t>
+            </a:r>
+            <a:r>
+              <a:rPr sz="1800" b="0">
+                <a:solidFill>
+                  <a:srgbClr val="A02B93"/>
+                </a:solidFill>
+                <a:latin typeface="Microsoft YaHei"/>
+                <a:ea typeface="Microsoft YaHei"/>
+                <a:cs typeface="Microsoft YaHei"/>
+              </a:rPr>
+              <a:t>pacman</a:t>
+            </a:r>
+            <a:r>
+              <a:rPr sz="1800" b="0">
+                <a:solidFill>
+                  <a:srgbClr val="29263B"/>
+                </a:solidFill>
+                <a:latin typeface="Microsoft YaHei"/>
+                <a:ea typeface="Microsoft YaHei"/>
+                <a:cs typeface="Microsoft YaHei"/>
+              </a:rPr>
+              <a:t> 步骤安装；这不代替 ARM SDK。</a:t>
             </a:r>
           </a:p>
         </p:txBody>
@@ -38841,7 +40046,16 @@
               <a:rPr u="sng">
                 <a:hlinkClick r:id="rId3"/>
               </a:rPr>
-              <a:t>依据：CMake 帮助：manual/cmake-buildsystem.7.rst</a:t>
+              <a:t>依据：CMake 帮助：manual/cmake-</a:t>
+            </a:r>
+            <a:r>
+              <a:rPr u="sng">
+                <a:solidFill>
+                  <a:srgbClr val="0070C0"/>
+                </a:solidFill>
+                <a:hlinkClick r:id="rId3"/>
+              </a:rPr>
+              <a:t>buildsystem.7.rst</a:t>
             </a:r>
           </a:p>
         </p:txBody>
@@ -39250,11 +40464,58 @@
                 <a:ea typeface="Consolas"/>
                 <a:cs typeface="Consolas"/>
               </a:rPr>
-              <a:t>#include &lt;stdio.h&gt;</a:t>
+              <a:t>#</a:t>
+            </a:r>
+            <a:r>
+              <a:rPr sz="1725" b="0">
+                <a:solidFill>
+                  <a:srgbClr val="087B3D"/>
+                </a:solidFill>
+                <a:latin typeface="Consolas"/>
+                <a:ea typeface="Consolas"/>
+                <a:cs typeface="Consolas"/>
+              </a:rPr>
+              <a:t>include</a:t>
+            </a:r>
+            <a:r>
+              <a:rPr sz="1725" b="0">
+                <a:solidFill>
+                  <a:srgbClr val="29263B"/>
+                </a:solidFill>
+                <a:latin typeface="Consolas"/>
+                <a:ea typeface="Consolas"/>
+                <a:cs typeface="Consolas"/>
+              </a:rPr>
+              <a:t> &lt;</a:t>
+            </a:r>
+            <a:r>
+              <a:rPr sz="1725" b="0">
+                <a:solidFill>
+                  <a:srgbClr val="0070C0"/>
+                </a:solidFill>
+                <a:latin typeface="Consolas"/>
+                <a:ea typeface="Consolas"/>
+                <a:cs typeface="Consolas"/>
+              </a:rPr>
+              <a:t>stdio.h</a:t>
+            </a:r>
+            <a:r>
+              <a:rPr sz="1725" b="0">
+                <a:solidFill>
+                  <a:srgbClr val="29263B"/>
+                </a:solidFill>
+                <a:latin typeface="Consolas"/>
+                <a:ea typeface="Consolas"/>
+                <a:cs typeface="Consolas"/>
+              </a:rPr>
+              <a:t>&gt;</a:t>
             </a:r>
           </a:p>
           <a:p>
             <a:pPr>
+              <a:lnSpc>
+                <a:spcPct val="120000"/>
+              </a:lnSpc>
               <a:spcAft>
                 <a:spcPts val="0"/>
               </a:spcAft>
@@ -39303,27 +40564,19 @@
                 <a:ea typeface="Consolas"/>
                 <a:cs typeface="Consolas"/>
               </a:rPr>
-              <a:t>int main(void)</a:t>
-            </a:r>
-          </a:p>
-          <a:p>
-            <a:pPr>
-              <a:lnSpc>
-                <a:spcPct val="120000"/>
-              </a:lnSpc>
-              <a:spcAft>
-                <a:spcPts val="0"/>
-              </a:spcAft>
-              <a:buNone/>
-              <a:defRPr sz="1725" b="0">
-                <a:solidFill>
-                  <a:srgbClr val="29263B"/>
+              <a:t>int </a:t>
+            </a:r>
+            <a:r>
+              <a:rPr sz="1725" b="0">
+                <a:solidFill>
+                  <a:srgbClr val="087B3D"/>
                 </a:solidFill>
                 <a:latin typeface="Consolas"/>
                 <a:ea typeface="Consolas"/>
                 <a:cs typeface="Consolas"/>
-              </a:defRPr>
-            </a:pPr>
+              </a:rPr>
+              <a:t>main</a:t>
+            </a:r>
             <a:r>
               <a:rPr sz="1725" b="0">
                 <a:solidFill>
@@ -39333,7 +40586,7 @@
                 <a:ea typeface="Consolas"/>
                 <a:cs typeface="Consolas"/>
               </a:rPr>
-              <a:t>{</a:t>
+              <a:t>(void)</a:t>
             </a:r>
           </a:p>
           <a:p>
@@ -39363,7 +40616,59 @@
                 <a:ea typeface="Consolas"/>
                 <a:cs typeface="Consolas"/>
               </a:rPr>
-              <a:t>    puts("Hello from native CMake");</a:t>
+              <a:t>{</a:t>
+            </a:r>
+          </a:p>
+          <a:p>
+            <a:pPr>
+              <a:lnSpc>
+                <a:spcPct val="120000"/>
+              </a:lnSpc>
+              <a:spcAft>
+                <a:spcPts val="0"/>
+              </a:spcAft>
+              <a:buNone/>
+              <a:defRPr sz="1725" b="0">
+                <a:solidFill>
+                  <a:srgbClr val="29263B"/>
+                </a:solidFill>
+                <a:latin typeface="Consolas"/>
+                <a:ea typeface="Consolas"/>
+                <a:cs typeface="Consolas"/>
+              </a:defRPr>
+            </a:pPr>
+            <a:r>
+              <a:rPr sz="1725" b="0">
+                <a:solidFill>
+                  <a:srgbClr val="29263B"/>
+                </a:solidFill>
+                <a:latin typeface="Consolas"/>
+                <a:ea typeface="Consolas"/>
+                <a:cs typeface="Consolas"/>
+              </a:rPr>
+              <a:t>    </a:t>
+            </a:r>
+            <a:r>
+              <a:rPr sz="1725" b="0">
+                <a:solidFill>
+                  <a:srgbClr val="087B3D"/>
+                </a:solidFill>
+                <a:latin typeface="Consolas"/>
+                <a:ea typeface="Consolas"/>
+                <a:cs typeface="Consolas"/>
+              </a:rPr>
+              <a:t>puts</a:t>
+            </a:r>
+            <a:r>
+              <a:rPr sz="1725" b="0">
+                <a:solidFill>
+                  <a:srgbClr val="29263B"/>
+                </a:solidFill>
+                <a:latin typeface="Consolas"/>
+                <a:ea typeface="Consolas"/>
+                <a:cs typeface="Consolas"/>
+              </a:rPr>
+              <a:t>("Hello from native CMake");</a:t>
             </a:r>
           </a:p>
           <a:p>
@@ -39498,7 +40803,29 @@
                 <a:ea typeface="Microsoft YaHei"/>
                 <a:cs typeface="Microsoft YaHei"/>
               </a:rPr>
-              <a:t>自行创建 source/main.c；完整目录创建与写文件操作见 MD。</a:t>
+              <a:t>自行创建 </a:t>
+            </a:r>
+            <a:r>
+              <a:rPr sz="1800" b="0">
+                <a:solidFill>
+                  <a:srgbClr val="0070C0"/>
+                </a:solidFill>
+                <a:latin typeface="Microsoft YaHei"/>
+                <a:ea typeface="Microsoft YaHei"/>
+                <a:cs typeface="Microsoft YaHei"/>
+              </a:rPr>
+              <a:t>source/main.c</a:t>
+            </a:r>
+            <a:r>
+              <a:rPr sz="1800" b="0">
+                <a:solidFill>
+                  <a:srgbClr val="29263B"/>
+                </a:solidFill>
+                <a:latin typeface="Microsoft YaHei"/>
+                <a:ea typeface="Microsoft YaHei"/>
+                <a:cs typeface="Microsoft YaHei"/>
+              </a:rPr>
+              <a:t>；完整目录创建与写文件操作见 MD。</a:t>
             </a:r>
           </a:p>
           <a:p>
@@ -39598,7 +40925,16 @@
               <a:rPr u="sng">
                 <a:hlinkClick r:id="rId3"/>
               </a:rPr>
-              <a:t>依据：CMake 帮助：manual/cmake-buildsystem.7.rst</a:t>
+              <a:t>依据：CMake 帮助：manual/cmake-</a:t>
+            </a:r>
+            <a:r>
+              <a:rPr u="sng">
+                <a:solidFill>
+                  <a:srgbClr val="0070C0"/>
+                </a:solidFill>
+                <a:hlinkClick r:id="rId3"/>
+              </a:rPr>
+              <a:t>buildsystem.7.rst</a:t>
             </a:r>
           </a:p>
         </p:txBody>
@@ -40015,34 +41351,18 @@
                 <a:ea typeface="Consolas"/>
                 <a:cs typeface="Consolas"/>
               </a:rPr>
-              <a:t>(VERSION 3.28)</a:t>
-            </a:r>
-          </a:p>
-          <a:p>
-            <a:pPr>
-              <a:lnSpc>
-                <a:spcPct val="120000"/>
-              </a:lnSpc>
-              <a:spcAft>
-                <a:spcPts val="0"/>
-              </a:spcAft>
-              <a:buNone/>
-              <a:defRPr sz="1725" b="0">
-                <a:solidFill>
-                  <a:srgbClr val="29263B"/>
+              <a:t>(</a:t>
+            </a:r>
+            <a:r>
+              <a:rPr sz="1725" b="0">
+                <a:solidFill>
+                  <a:srgbClr val="B84E00"/>
                 </a:solidFill>
                 <a:latin typeface="Consolas"/>
                 <a:ea typeface="Consolas"/>
                 <a:cs typeface="Consolas"/>
-              </a:defRPr>
-            </a:pPr>
-            <a:r>
-              <a:rPr>
-                <a:solidFill>
-                  <a:srgbClr val="087B3D"/>
-                </a:solidFill>
-              </a:rPr>
-              <a:t>project</a:t>
+              </a:rPr>
+              <a:t>VERSION</a:t>
             </a:r>
             <a:r>
               <a:rPr sz="1725" b="0">
@@ -40053,7 +41373,7 @@
                 <a:ea typeface="Consolas"/>
                 <a:cs typeface="Consolas"/>
               </a:rPr>
-              <a:t>(native_demo LANGUAGES C)</a:t>
+              <a:t> 3.28)</a:t>
             </a:r>
           </a:p>
           <a:p>
@@ -40080,7 +41400,7 @@
                   <a:srgbClr val="087B3D"/>
                 </a:solidFill>
               </a:rPr>
-              <a:t>add_executable</a:t>
+              <a:t>project</a:t>
             </a:r>
             <a:r>
               <a:rPr sz="1725" b="0">
@@ -40091,7 +41411,89 @@
                 <a:ea typeface="Consolas"/>
                 <a:cs typeface="Consolas"/>
               </a:rPr>
-              <a:t>(my_app main.c)</a:t>
+              <a:t>(native_demo </a:t>
+            </a:r>
+            <a:r>
+              <a:rPr sz="1725" b="0">
+                <a:solidFill>
+                  <a:srgbClr val="B84E00"/>
+                </a:solidFill>
+                <a:latin typeface="Consolas"/>
+                <a:ea typeface="Consolas"/>
+                <a:cs typeface="Consolas"/>
+              </a:rPr>
+              <a:t>LANGUAGES</a:t>
+            </a:r>
+            <a:r>
+              <a:rPr sz="1725" b="0">
+                <a:solidFill>
+                  <a:srgbClr val="29263B"/>
+                </a:solidFill>
+                <a:latin typeface="Consolas"/>
+                <a:ea typeface="Consolas"/>
+                <a:cs typeface="Consolas"/>
+              </a:rPr>
+              <a:t> C)</a:t>
+            </a:r>
+          </a:p>
+          <a:p>
+            <a:pPr>
+              <a:lnSpc>
+                <a:spcPct val="120000"/>
+              </a:lnSpc>
+              <a:spcAft>
+                <a:spcPts val="0"/>
+              </a:spcAft>
+              <a:buNone/>
+              <a:defRPr sz="1725" b="0">
+                <a:solidFill>
+                  <a:srgbClr val="29263B"/>
+                </a:solidFill>
+                <a:latin typeface="Consolas"/>
+                <a:ea typeface="Consolas"/>
+                <a:cs typeface="Consolas"/>
+              </a:defRPr>
+            </a:pPr>
+            <a:r>
+              <a:rPr>
+                <a:solidFill>
+                  <a:srgbClr val="087B3D"/>
+                </a:solidFill>
+              </a:rPr>
+              <a:t>add_executable</a:t>
+            </a:r>
+            <a:r>
+              <a:rPr sz="1725" b="0">
+                <a:solidFill>
+                  <a:srgbClr val="29263B"/>
+                </a:solidFill>
+                <a:latin typeface="Consolas"/>
+                <a:ea typeface="Consolas"/>
+                <a:cs typeface="Consolas"/>
+              </a:rPr>
+              <a:t>(my_app </a:t>
+            </a:r>
+            <a:r>
+              <a:rPr sz="1725" b="0">
+                <a:solidFill>
+                  <a:srgbClr val="0070C0"/>
+                </a:solidFill>
+                <a:latin typeface="Consolas"/>
+                <a:ea typeface="Consolas"/>
+                <a:cs typeface="Consolas"/>
+              </a:rPr>
+              <a:t>main.c</a:t>
+            </a:r>
+            <a:r>
+              <a:rPr sz="1725" b="0">
+                <a:solidFill>
+                  <a:srgbClr val="29263B"/>
+                </a:solidFill>
+                <a:latin typeface="Consolas"/>
+                <a:ea typeface="Consolas"/>
+                <a:cs typeface="Consolas"/>
+              </a:rPr>
+              <a:t>)</a:t>
             </a:r>
           </a:p>
         </p:txBody>
@@ -40212,7 +41614,29 @@
                 <a:ea typeface="Microsoft YaHei"/>
                 <a:cs typeface="Microsoft YaHei"/>
               </a:rPr>
-              <a:t> 创建 my_app 目标，main.c 是它的源码。</a:t>
+              <a:t> 创建 my_app 目标，</a:t>
+            </a:r>
+            <a:r>
+              <a:rPr sz="1800" b="0">
+                <a:solidFill>
+                  <a:srgbClr val="0070C0"/>
+                </a:solidFill>
+                <a:latin typeface="Microsoft YaHei"/>
+                <a:ea typeface="Microsoft YaHei"/>
+                <a:cs typeface="Microsoft YaHei"/>
+              </a:rPr>
+              <a:t>main.c</a:t>
+            </a:r>
+            <a:r>
+              <a:rPr sz="1800" b="0">
+                <a:solidFill>
+                  <a:srgbClr val="29263B"/>
+                </a:solidFill>
+                <a:latin typeface="Microsoft YaHei"/>
+                <a:ea typeface="Microsoft YaHei"/>
+                <a:cs typeface="Microsoft YaHei"/>
+              </a:rPr>
+              <a:t> 是它的源码。</a:t>
             </a:r>
           </a:p>
           <a:p>
@@ -40242,7 +41666,29 @@
                 <a:ea typeface="Microsoft YaHei"/>
                 <a:cs typeface="Microsoft YaHei"/>
               </a:rPr>
-              <a:t>在 Windows 上构建这个目标，得到 my_app.exe。</a:t>
+              <a:t>在 Windows 上构建这个目标，得到 </a:t>
+            </a:r>
+            <a:r>
+              <a:rPr sz="1800" b="0">
+                <a:solidFill>
+                  <a:srgbClr val="0070C0"/>
+                </a:solidFill>
+                <a:latin typeface="Microsoft YaHei"/>
+                <a:ea typeface="Microsoft YaHei"/>
+                <a:cs typeface="Microsoft YaHei"/>
+              </a:rPr>
+              <a:t>my_app.exe</a:t>
+            </a:r>
+            <a:r>
+              <a:rPr sz="1800" b="0">
+                <a:solidFill>
+                  <a:srgbClr val="29263B"/>
+                </a:solidFill>
+                <a:latin typeface="Microsoft YaHei"/>
+                <a:ea typeface="Microsoft YaHei"/>
+                <a:cs typeface="Microsoft YaHei"/>
+              </a:rPr>
+              <a:t>。</a:t>
             </a:r>
           </a:p>
         </p:txBody>
@@ -40312,7 +41758,16 @@
               <a:rPr u="sng">
                 <a:hlinkClick r:id="rId3"/>
               </a:rPr>
-              <a:t>依据：CMake 帮助：manual/cmake-buildsystem.7.rst</a:t>
+              <a:t>依据：CMake 帮助：manual/cmake-</a:t>
+            </a:r>
+            <a:r>
+              <a:rPr u="sng">
+                <a:solidFill>
+                  <a:srgbClr val="0070C0"/>
+                </a:solidFill>
+                <a:hlinkClick r:id="rId3"/>
+              </a:rPr>
+              <a:t>buildsystem.7.rst</a:t>
             </a:r>
           </a:p>
         </p:txBody>
@@ -40715,7 +42170,7 @@
             <a:r>
               <a:rPr sz="1725" b="0">
                 <a:solidFill>
-                  <a:srgbClr val="29263B"/>
+                  <a:srgbClr val="646173"/>
                 </a:solidFill>
                 <a:latin typeface="Consolas"/>
                 <a:ea typeface="Consolas"/>
@@ -40805,56 +42260,40 @@
                 <a:ea typeface="Consolas"/>
                 <a:cs typeface="Consolas"/>
               </a:rPr>
-              <a:t> -S build</a:t>
-            </a:r>
-            <a:r>
-              <a:rPr>
-                <a:solidFill>
-                  <a:srgbClr val="0070C0"/>
-                </a:solidFill>
-              </a:rPr>
-              <a:t>/learning-tools/cmake-native/source</a:t>
+              <a:t> </a:t>
             </a:r>
             <a:r>
               <a:rPr sz="1725" b="0">
                 <a:solidFill>
-                  <a:srgbClr val="29263B"/>
+                  <a:srgbClr val="B84E00"/>
                 </a:solidFill>
                 <a:latin typeface="Consolas"/>
                 <a:ea typeface="Consolas"/>
                 <a:cs typeface="Consolas"/>
               </a:rPr>
-              <a:t> \</a:t>
-            </a:r>
-          </a:p>
-          <a:p>
-            <a:pPr>
-              <a:lnSpc>
-                <a:spcPct val="120000"/>
-              </a:lnSpc>
-              <a:spcAft>
-                <a:spcPts val="0"/>
-              </a:spcAft>
-              <a:buNone/>
-              <a:defRPr sz="1725" b="0">
+              <a:t>-S</a:t>
+            </a:r>
+            <a:r>
+              <a:rPr sz="1725" b="0">
                 <a:solidFill>
                   <a:srgbClr val="29263B"/>
                 </a:solidFill>
                 <a:latin typeface="Consolas"/>
                 <a:ea typeface="Consolas"/>
                 <a:cs typeface="Consolas"/>
-              </a:defRPr>
-            </a:pPr>
+              </a:rPr>
+              <a:t> </a:t>
+            </a:r>
             <a:r>
               <a:rPr sz="1725" b="0">
                 <a:solidFill>
-                  <a:srgbClr val="29263B"/>
+                  <a:srgbClr val="0070C0"/>
                 </a:solidFill>
                 <a:latin typeface="Consolas"/>
                 <a:ea typeface="Consolas"/>
                 <a:cs typeface="Consolas"/>
               </a:rPr>
-              <a:t>  -B build</a:t>
+              <a:t>build</a:t>
             </a:r>
             <a:r>
               <a:rPr>
@@ -40862,7 +42301,7 @@
                   <a:srgbClr val="0070C0"/>
                 </a:solidFill>
               </a:rPr>
-              <a:t>/learning-tools/cmake-native/out</a:t>
+              <a:t>/learning-tools/cmake-native/source</a:t>
             </a:r>
             <a:r>
               <a:rPr sz="1725" b="0">
@@ -40873,7 +42312,111 @@
                 <a:ea typeface="Consolas"/>
                 <a:cs typeface="Consolas"/>
               </a:rPr>
-              <a:t> -G Ninja</a:t>
+              <a:t> \</a:t>
+            </a:r>
+          </a:p>
+          <a:p>
+            <a:pPr>
+              <a:lnSpc>
+                <a:spcPct val="120000"/>
+              </a:lnSpc>
+              <a:spcAft>
+                <a:spcPts val="0"/>
+              </a:spcAft>
+              <a:buNone/>
+              <a:defRPr sz="1725" b="0">
+                <a:solidFill>
+                  <a:srgbClr val="29263B"/>
+                </a:solidFill>
+                <a:latin typeface="Consolas"/>
+                <a:ea typeface="Consolas"/>
+                <a:cs typeface="Consolas"/>
+              </a:defRPr>
+            </a:pPr>
+            <a:r>
+              <a:rPr sz="1725" b="0">
+                <a:solidFill>
+                  <a:srgbClr val="29263B"/>
+                </a:solidFill>
+                <a:latin typeface="Consolas"/>
+                <a:ea typeface="Consolas"/>
+                <a:cs typeface="Consolas"/>
+              </a:rPr>
+              <a:t>  </a:t>
+            </a:r>
+            <a:r>
+              <a:rPr sz="1725" b="0">
+                <a:solidFill>
+                  <a:srgbClr val="B84E00"/>
+                </a:solidFill>
+                <a:latin typeface="Consolas"/>
+                <a:ea typeface="Consolas"/>
+                <a:cs typeface="Consolas"/>
+              </a:rPr>
+              <a:t>-B</a:t>
+            </a:r>
+            <a:r>
+              <a:rPr sz="1725" b="0">
+                <a:solidFill>
+                  <a:srgbClr val="29263B"/>
+                </a:solidFill>
+                <a:latin typeface="Consolas"/>
+                <a:ea typeface="Consolas"/>
+                <a:cs typeface="Consolas"/>
+              </a:rPr>
+              <a:t> </a:t>
+            </a:r>
+            <a:r>
+              <a:rPr sz="1725" b="0">
+                <a:solidFill>
+                  <a:srgbClr val="0070C0"/>
+                </a:solidFill>
+                <a:latin typeface="Consolas"/>
+                <a:ea typeface="Consolas"/>
+                <a:cs typeface="Consolas"/>
+              </a:rPr>
+              <a:t>build</a:t>
+            </a:r>
+            <a:r>
+              <a:rPr>
+                <a:solidFill>
+                  <a:srgbClr val="0070C0"/>
+                </a:solidFill>
+              </a:rPr>
+              <a:t>/learning-tools/cmake-native/out</a:t>
+            </a:r>
+            <a:r>
+              <a:rPr sz="1725" b="0">
+                <a:solidFill>
+                  <a:srgbClr val="29263B"/>
+                </a:solidFill>
+                <a:latin typeface="Consolas"/>
+                <a:ea typeface="Consolas"/>
+                <a:cs typeface="Consolas"/>
+              </a:rPr>
+              <a:t> </a:t>
+            </a:r>
+            <a:r>
+              <a:rPr sz="1725" b="0">
+                <a:solidFill>
+                  <a:srgbClr val="B84E00"/>
+                </a:solidFill>
+                <a:latin typeface="Consolas"/>
+                <a:ea typeface="Consolas"/>
+                <a:cs typeface="Consolas"/>
+              </a:rPr>
+              <a:t>-G</a:t>
+            </a:r>
+            <a:r>
+              <a:rPr sz="1725" b="0">
+                <a:solidFill>
+                  <a:srgbClr val="29263B"/>
+                </a:solidFill>
+                <a:latin typeface="Consolas"/>
+                <a:ea typeface="Consolas"/>
+                <a:cs typeface="Consolas"/>
+              </a:rPr>
+              <a:t> Ninja</a:t>
             </a:r>
           </a:p>
         </p:txBody>
@@ -40978,7 +42521,51 @@
                 <a:ea typeface="Microsoft YaHei"/>
                 <a:cs typeface="Microsoft YaHei"/>
               </a:rPr>
-              <a:t>生成 out/CMakeCache.txt 和 out/build.ninja；失败时不继续 build。</a:t>
+              <a:t>生成 </a:t>
+            </a:r>
+            <a:r>
+              <a:rPr sz="1800" b="0">
+                <a:solidFill>
+                  <a:srgbClr val="0070C0"/>
+                </a:solidFill>
+                <a:latin typeface="Microsoft YaHei"/>
+                <a:ea typeface="Microsoft YaHei"/>
+                <a:cs typeface="Microsoft YaHei"/>
+              </a:rPr>
+              <a:t>out/CMakeCache.txt</a:t>
+            </a:r>
+            <a:r>
+              <a:rPr sz="1800" b="0">
+                <a:solidFill>
+                  <a:srgbClr val="29263B"/>
+                </a:solidFill>
+                <a:latin typeface="Microsoft YaHei"/>
+                <a:ea typeface="Microsoft YaHei"/>
+                <a:cs typeface="Microsoft YaHei"/>
+              </a:rPr>
+              <a:t> 和 </a:t>
+            </a:r>
+            <a:r>
+              <a:rPr sz="1800" b="0">
+                <a:solidFill>
+                  <a:srgbClr val="0070C0"/>
+                </a:solidFill>
+                <a:latin typeface="Microsoft YaHei"/>
+                <a:ea typeface="Microsoft YaHei"/>
+                <a:cs typeface="Microsoft YaHei"/>
+              </a:rPr>
+              <a:t>out/build.ninja</a:t>
+            </a:r>
+            <a:r>
+              <a:rPr sz="1800" b="0">
+                <a:solidFill>
+                  <a:srgbClr val="29263B"/>
+                </a:solidFill>
+                <a:latin typeface="Microsoft YaHei"/>
+                <a:ea typeface="Microsoft YaHei"/>
+                <a:cs typeface="Microsoft YaHei"/>
+              </a:rPr>
+              <a:t>；失败时不继续 build。</a:t>
             </a:r>
           </a:p>
         </p:txBody>
@@ -41048,7 +42635,16 @@
               <a:rPr u="sng">
                 <a:hlinkClick r:id="rId3"/>
               </a:rPr>
-              <a:t>依据：CMake 帮助：manual/cmake-buildsystem.7.rst</a:t>
+              <a:t>依据：CMake 帮助：manual/cmake-</a:t>
+            </a:r>
+            <a:r>
+              <a:rPr u="sng">
+                <a:solidFill>
+                  <a:srgbClr val="0070C0"/>
+                </a:solidFill>
+                <a:hlinkClick r:id="rId3"/>
+              </a:rPr>
+              <a:t>buildsystem.7.rst</a:t>
             </a:r>
           </a:p>
         </p:txBody>
